--- a/slides/Lesson 5 - Building the RAG Assistant.pptx
+++ b/slides/Lesson 5 - Building the RAG Assistant.pptx
@@ -9344,7 +9344,7 @@
                 </a:solidFill>
                 <a:latin typeface="Poppins"/>
               </a:rPr>
-              <a:t>2.  Hallucination, and why pasting everything fails</a:t>
+              <a:t>2.  Why it makes things up, and why pasting everything fails</a:t>
             </a:r>
           </a:p>
           <a:p>
@@ -10197,7 +10197,7 @@
                 </a:solidFill>
                 <a:latin typeface="Poppins ExtraBold"/>
               </a:rPr>
-              <a:t>Why AI lies</a:t>
+              <a:t>Why AI invents</a:t>
             </a:r>
           </a:p>
         </p:txBody>
@@ -10232,7 +10232,7 @@
                 </a:solidFill>
                 <a:latin typeface="Poppins"/>
               </a:rPr>
-              <a:t>Hallucination, and why pasting everything fails</a:t>
+              <a:t>Why it makes things up, and why pasting everything fails</a:t>
             </a:r>
           </a:p>
         </p:txBody>
@@ -11277,8 +11277,8 @@
         </p:nvSpPr>
         <p:spPr>
           <a:xfrm>
-            <a:off x="941832" y="3008376"/>
-            <a:ext cx="8083296" cy="3017520"/>
+            <a:off x="941831" y="3008376"/>
+            <a:ext cx="5236464" cy="3017520"/>
           </a:xfrm>
           <a:prstGeom prst="rect">
             <a:avLst/>
@@ -11321,8 +11321,8 @@
         </p:nvSpPr>
         <p:spPr>
           <a:xfrm>
-            <a:off x="832104" y="2907792"/>
-            <a:ext cx="8083296" cy="3017520"/>
+            <a:off x="832103" y="2907792"/>
+            <a:ext cx="5236464" cy="3017520"/>
           </a:xfrm>
           <a:prstGeom prst="rect">
             <a:avLst/>
@@ -11365,8 +11365,8 @@
         </p:nvSpPr>
         <p:spPr>
           <a:xfrm>
-            <a:off x="2221991" y="3648456"/>
-            <a:ext cx="6035040" cy="640080"/>
+            <a:off x="1490471" y="3557016"/>
+            <a:ext cx="4139183" cy="731520"/>
           </a:xfrm>
           <a:prstGeom prst="rect">
             <a:avLst/>
@@ -11381,7 +11381,7 @@
           <a:p>
             <a:pPr algn="l"/>
             <a:r>
-              <a:rPr sz="3200">
+              <a:rPr sz="2500">
                 <a:solidFill>
                   <a:srgbClr val="434343"/>
                 </a:solidFill>
@@ -11400,8 +11400,8 @@
         </p:nvSpPr>
         <p:spPr>
           <a:xfrm>
-            <a:off x="2221991" y="4471416"/>
-            <a:ext cx="5486400" cy="1280160"/>
+            <a:off x="1490471" y="4379976"/>
+            <a:ext cx="4139183" cy="1463040"/>
           </a:xfrm>
           <a:prstGeom prst="rect">
             <a:avLst/>
@@ -11416,7 +11416,7 @@
           <a:p>
             <a:pPr algn="l"/>
             <a:r>
-              <a:rPr sz="1800">
+              <a:rPr sz="1500">
                 <a:solidFill>
                   <a:srgbClr val="434343"/>
                 </a:solidFill>
@@ -11435,8 +11435,8 @@
         </p:nvSpPr>
         <p:spPr>
           <a:xfrm>
-            <a:off x="9372600" y="3008376"/>
-            <a:ext cx="8083296" cy="3017520"/>
+            <a:off x="6525767" y="3008376"/>
+            <a:ext cx="5236464" cy="3017520"/>
           </a:xfrm>
           <a:prstGeom prst="rect">
             <a:avLst/>
@@ -11479,8 +11479,8 @@
         </p:nvSpPr>
         <p:spPr>
           <a:xfrm>
-            <a:off x="9262872" y="2907792"/>
-            <a:ext cx="8083296" cy="3017520"/>
+            <a:off x="6416039" y="2907792"/>
+            <a:ext cx="5236464" cy="3017520"/>
           </a:xfrm>
           <a:prstGeom prst="rect">
             <a:avLst/>
@@ -11523,8 +11523,8 @@
         </p:nvSpPr>
         <p:spPr>
           <a:xfrm>
-            <a:off x="10652760" y="3648456"/>
-            <a:ext cx="6035040" cy="640080"/>
+            <a:off x="7074407" y="3557016"/>
+            <a:ext cx="4139183" cy="731520"/>
           </a:xfrm>
           <a:prstGeom prst="rect">
             <a:avLst/>
@@ -11539,7 +11539,7 @@
           <a:p>
             <a:pPr algn="l"/>
             <a:r>
-              <a:rPr sz="3200">
+              <a:rPr sz="2500">
                 <a:solidFill>
                   <a:srgbClr val="434343"/>
                 </a:solidFill>
@@ -11558,8 +11558,8 @@
         </p:nvSpPr>
         <p:spPr>
           <a:xfrm>
-            <a:off x="10652760" y="4471416"/>
-            <a:ext cx="5486400" cy="1280160"/>
+            <a:off x="7074407" y="4379976"/>
+            <a:ext cx="4139183" cy="1463040"/>
           </a:xfrm>
           <a:prstGeom prst="rect">
             <a:avLst/>
@@ -11574,7 +11574,7 @@
           <a:p>
             <a:pPr algn="l"/>
             <a:r>
-              <a:rPr sz="1800">
+              <a:rPr sz="1500">
                 <a:solidFill>
                   <a:srgbClr val="434343"/>
                 </a:solidFill>
@@ -11593,8 +11593,8 @@
         </p:nvSpPr>
         <p:spPr>
           <a:xfrm>
-            <a:off x="941832" y="6428232"/>
-            <a:ext cx="8083296" cy="3017520"/>
+            <a:off x="12109703" y="3008376"/>
+            <a:ext cx="5236464" cy="3017520"/>
           </a:xfrm>
           <a:prstGeom prst="rect">
             <a:avLst/>
@@ -11637,8 +11637,8 @@
         </p:nvSpPr>
         <p:spPr>
           <a:xfrm>
-            <a:off x="832104" y="6327648"/>
-            <a:ext cx="8083296" cy="3017520"/>
+            <a:off x="11999976" y="2907792"/>
+            <a:ext cx="5236464" cy="3017520"/>
           </a:xfrm>
           <a:prstGeom prst="rect">
             <a:avLst/>
@@ -11681,8 +11681,8 @@
         </p:nvSpPr>
         <p:spPr>
           <a:xfrm>
-            <a:off x="2221991" y="7068312"/>
-            <a:ext cx="6035040" cy="640080"/>
+            <a:off x="12658343" y="3557016"/>
+            <a:ext cx="4139183" cy="731520"/>
           </a:xfrm>
           <a:prstGeom prst="rect">
             <a:avLst/>
@@ -11697,7 +11697,7 @@
           <a:p>
             <a:pPr algn="l"/>
             <a:r>
-              <a:rPr sz="3200">
+              <a:rPr sz="2500">
                 <a:solidFill>
                   <a:srgbClr val="434343"/>
                 </a:solidFill>
@@ -11716,8 +11716,8 @@
         </p:nvSpPr>
         <p:spPr>
           <a:xfrm>
-            <a:off x="2221991" y="7891272"/>
-            <a:ext cx="5486400" cy="1280160"/>
+            <a:off x="12658343" y="4379976"/>
+            <a:ext cx="4139183" cy="1463040"/>
           </a:xfrm>
           <a:prstGeom prst="rect">
             <a:avLst/>
@@ -11732,7 +11732,7 @@
           <a:p>
             <a:pPr algn="l"/>
             <a:r>
-              <a:rPr sz="1800">
+              <a:rPr sz="1500">
                 <a:solidFill>
                   <a:srgbClr val="434343"/>
                 </a:solidFill>
@@ -11751,8 +11751,8 @@
         </p:nvSpPr>
         <p:spPr>
           <a:xfrm>
-            <a:off x="9372600" y="6428232"/>
-            <a:ext cx="8083296" cy="3017520"/>
+            <a:off x="3733799" y="6428232"/>
+            <a:ext cx="5236464" cy="3017520"/>
           </a:xfrm>
           <a:prstGeom prst="rect">
             <a:avLst/>
@@ -11795,8 +11795,8 @@
         </p:nvSpPr>
         <p:spPr>
           <a:xfrm>
-            <a:off x="9262872" y="6327648"/>
-            <a:ext cx="8083296" cy="3017520"/>
+            <a:off x="3624071" y="6327648"/>
+            <a:ext cx="5236464" cy="3017520"/>
           </a:xfrm>
           <a:prstGeom prst="rect">
             <a:avLst/>
@@ -11839,8 +11839,8 @@
         </p:nvSpPr>
         <p:spPr>
           <a:xfrm>
-            <a:off x="10652760" y="7068312"/>
-            <a:ext cx="6035040" cy="640080"/>
+            <a:off x="4282439" y="6976872"/>
+            <a:ext cx="4139183" cy="731520"/>
           </a:xfrm>
           <a:prstGeom prst="rect">
             <a:avLst/>
@@ -11855,13 +11855,13 @@
           <a:p>
             <a:pPr algn="l"/>
             <a:r>
-              <a:rPr sz="3200">
+              <a:rPr sz="2500">
                 <a:solidFill>
                   <a:srgbClr val="434343"/>
                 </a:solidFill>
                 <a:latin typeface="Poppins ExtraBold"/>
               </a:rPr>
-              <a:t>Memory</a:t>
+              <a:t>Tune k</a:t>
             </a:r>
           </a:p>
         </p:txBody>
@@ -11874,8 +11874,8 @@
         </p:nvSpPr>
         <p:spPr>
           <a:xfrm>
-            <a:off x="10652760" y="7891272"/>
-            <a:ext cx="5486400" cy="1280160"/>
+            <a:off x="4282439" y="7799832"/>
+            <a:ext cx="4139183" cy="1463040"/>
           </a:xfrm>
           <a:prstGeom prst="rect">
             <a:avLst/>
@@ -11890,7 +11890,165 @@
           <a:p>
             <a:pPr algn="l"/>
             <a:r>
-              <a:rPr sz="1800">
+              <a:rPr sz="1500">
+                <a:solidFill>
+                  <a:srgbClr val="434343"/>
+                </a:solidFill>
+                <a:latin typeface="Poppins"/>
+              </a:rPr>
+              <a:t>How many chunks? Too few misses answers, too many makes them vague.</a:t>
+            </a:r>
+          </a:p>
+        </p:txBody>
+      </p:sp>
+      <p:sp>
+        <p:nvSpPr>
+          <p:cNvPr id="20" name="Rectangle 19"/>
+          <p:cNvSpPr/>
+          <p:nvPr/>
+        </p:nvSpPr>
+        <p:spPr>
+          <a:xfrm>
+            <a:off x="9317736" y="6428232"/>
+            <a:ext cx="5236464" cy="3017520"/>
+          </a:xfrm>
+          <a:prstGeom prst="rect">
+            <a:avLst/>
+          </a:prstGeom>
+          <a:solidFill>
+            <a:srgbClr val="31C59E"/>
+          </a:solidFill>
+          <a:ln>
+            <a:noFill/>
+          </a:ln>
+          <a:effectLst/>
+        </p:spPr>
+        <p:style>
+          <a:lnRef idx="1">
+            <a:schemeClr val="accent1"/>
+          </a:lnRef>
+          <a:fillRef idx="3">
+            <a:schemeClr val="accent1"/>
+          </a:fillRef>
+          <a:effectRef idx="2">
+            <a:schemeClr val="accent1"/>
+          </a:effectRef>
+          <a:fontRef idx="minor">
+            <a:schemeClr val="lt1"/>
+          </a:fontRef>
+        </p:style>
+        <p:txBody>
+          <a:bodyPr rtlCol="0" anchor="ctr"/>
+          <a:lstStyle/>
+          <a:p>
+            <a:pPr algn="ctr"/>
+          </a:p>
+        </p:txBody>
+      </p:sp>
+      <p:sp>
+        <p:nvSpPr>
+          <p:cNvPr id="21" name="Rectangle 20"/>
+          <p:cNvSpPr/>
+          <p:nvPr/>
+        </p:nvSpPr>
+        <p:spPr>
+          <a:xfrm>
+            <a:off x="9208008" y="6327648"/>
+            <a:ext cx="5236464" cy="3017520"/>
+          </a:xfrm>
+          <a:prstGeom prst="rect">
+            <a:avLst/>
+          </a:prstGeom>
+          <a:solidFill>
+            <a:srgbClr val="FFFFFF"/>
+          </a:solidFill>
+          <a:ln>
+            <a:noFill/>
+          </a:ln>
+          <a:effectLst/>
+        </p:spPr>
+        <p:style>
+          <a:lnRef idx="1">
+            <a:schemeClr val="accent1"/>
+          </a:lnRef>
+          <a:fillRef idx="3">
+            <a:schemeClr val="accent1"/>
+          </a:fillRef>
+          <a:effectRef idx="2">
+            <a:schemeClr val="accent1"/>
+          </a:effectRef>
+          <a:fontRef idx="minor">
+            <a:schemeClr val="lt1"/>
+          </a:fontRef>
+        </p:style>
+        <p:txBody>
+          <a:bodyPr rtlCol="0" anchor="ctr"/>
+          <a:lstStyle/>
+          <a:p>
+            <a:pPr algn="ctr"/>
+          </a:p>
+        </p:txBody>
+      </p:sp>
+      <p:sp>
+        <p:nvSpPr>
+          <p:cNvPr id="22" name="TextBox 21"/>
+          <p:cNvSpPr txBox="1"/>
+          <p:nvPr/>
+        </p:nvSpPr>
+        <p:spPr>
+          <a:xfrm>
+            <a:off x="9866376" y="6976872"/>
+            <a:ext cx="4139183" cy="731520"/>
+          </a:xfrm>
+          <a:prstGeom prst="rect">
+            <a:avLst/>
+          </a:prstGeom>
+          <a:noFill/>
+        </p:spPr>
+        <p:txBody>
+          <a:bodyPr wrap="square">
+            <a:spAutoFit/>
+          </a:bodyPr>
+          <a:lstStyle/>
+          <a:p>
+            <a:pPr algn="l"/>
+            <a:r>
+              <a:rPr sz="2500">
+                <a:solidFill>
+                  <a:srgbClr val="434343"/>
+                </a:solidFill>
+                <a:latin typeface="Poppins ExtraBold"/>
+              </a:rPr>
+              <a:t>Memory</a:t>
+            </a:r>
+          </a:p>
+        </p:txBody>
+      </p:sp>
+      <p:sp>
+        <p:nvSpPr>
+          <p:cNvPr id="23" name="TextBox 22"/>
+          <p:cNvSpPr txBox="1"/>
+          <p:nvPr/>
+        </p:nvSpPr>
+        <p:spPr>
+          <a:xfrm>
+            <a:off x="9866376" y="7799832"/>
+            <a:ext cx="4139183" cy="1463040"/>
+          </a:xfrm>
+          <a:prstGeom prst="rect">
+            <a:avLst/>
+          </a:prstGeom>
+          <a:noFill/>
+        </p:spPr>
+        <p:txBody>
+          <a:bodyPr wrap="square">
+            <a:spAutoFit/>
+          </a:bodyPr>
+          <a:lstStyle/>
+          <a:p>
+            <a:pPr algn="l"/>
+            <a:r>
+              <a:rPr sz="1500">
                 <a:solidFill>
                   <a:srgbClr val="434343"/>
                 </a:solidFill>

--- a/slides/Lesson 5 - Building the RAG Assistant.pptx
+++ b/slides/Lesson 5 - Building the RAG Assistant.pptx
@@ -11167,7 +11167,7 @@
                 </a:solidFill>
                 <a:latin typeface="Poppins Medium"/>
               </a:rPr>
-              <a:t>8 lessons · 2 hours each · you finish with a program that knows what you know</a:t>
+              <a:t>8 lessons · 2 hours each · you leave with a program that knows what you know</a:t>
             </a:r>
           </a:p>
         </p:txBody>
@@ -11422,7 +11422,7 @@
                 </a:solidFill>
                 <a:latin typeface="Poppins"/>
               </a:rPr>
-              <a:t>Retrieve the chunks, join them, and read the prompt you just built.</a:t>
+              <a:t>Retrieve, join, and read the prompt you just built.</a:t>
             </a:r>
           </a:p>
         </p:txBody>
@@ -11580,7 +11580,7 @@
                 </a:solidFill>
                 <a:latin typeface="Poppins"/>
               </a:rPr>
-              <a:t>Return the files each answer came from, so it can be checked.</a:t>
+              <a:t>Name the files each answer came from.</a:t>
             </a:r>
           </a:p>
         </p:txBody>
@@ -11738,7 +11738,7 @@
                 </a:solidFill>
                 <a:latin typeface="Poppins"/>
               </a:rPr>
-              <a:t>One sentence that stops it inventing answers.</a:t>
+              <a:t>One sentence that stops it inventing.</a:t>
             </a:r>
           </a:p>
         </p:txBody>
@@ -11896,7 +11896,7 @@
                 </a:solidFill>
                 <a:latin typeface="Poppins"/>
               </a:rPr>
-              <a:t>How many chunks? Too few misses answers, too many makes them vague.</a:t>
+              <a:t>Too few misses answers. Too many makes them vague.</a:t>
             </a:r>
           </a:p>
         </p:txBody>

--- a/slides/Lesson 5 - Building the RAG Assistant.pptx
+++ b/slides/Lesson 5 - Building the RAG Assistant.pptx
@@ -11,6 +11,10 @@
     <p:sldId id="256" r:id="rId12"/>
     <p:sldId id="257" r:id="rId11"/>
     <p:sldId id="258" r:id="rId10"/>
+    <p:sldId id="259" r:id="rId9"/>
+    <p:sldId id="260" r:id="rId8"/>
+    <p:sldId id="261" r:id="rId7"/>
+    <p:sldId id="262" r:id="rId6"/>
   </p:sldIdLst>
   <p:sldSz cy="10287000" cx="18288000"/>
   <p:notesSz cx="6858000" cy="9144000"/>
@@ -8509,6 +8513,94 @@
       <p:grpSpPr/>
       <p:sp>
         <p:nvSpPr>
+          <p:cNvPr id="2" name="TextBox 1"/>
+          <p:cNvSpPr txBox="1"/>
+          <p:nvPr/>
+        </p:nvSpPr>
+        <p:spPr>
+          <a:xfrm>
+            <a:off x="1828800" y="4023360"/>
+            <a:ext cx="14630400" cy="1828800"/>
+          </a:xfrm>
+          <a:prstGeom prst="rect">
+            <a:avLst/>
+          </a:prstGeom>
+          <a:noFill/>
+        </p:spPr>
+        <p:txBody>
+          <a:bodyPr wrap="square">
+            <a:spAutoFit/>
+          </a:bodyPr>
+          <a:lstStyle/>
+          <a:p>
+            <a:pPr algn="l"/>
+            <a:r>
+              <a:rPr sz="5400">
+                <a:solidFill>
+                  <a:srgbClr val="3627FC"/>
+                </a:solidFill>
+                <a:latin typeface="Poppins ExtraBold"/>
+              </a:rPr>
+              <a:t>Build an AI That Reads Your Notes</a:t>
+            </a:r>
+          </a:p>
+        </p:txBody>
+      </p:sp>
+      <p:sp>
+        <p:nvSpPr>
+          <p:cNvPr id="3" name="TextBox 2"/>
+          <p:cNvSpPr txBox="1"/>
+          <p:nvPr/>
+        </p:nvSpPr>
+        <p:spPr>
+          <a:xfrm>
+            <a:off x="1828800" y="6035040"/>
+            <a:ext cx="14630400" cy="731520"/>
+          </a:xfrm>
+          <a:prstGeom prst="rect">
+            <a:avLst/>
+          </a:prstGeom>
+          <a:noFill/>
+        </p:spPr>
+        <p:txBody>
+          <a:bodyPr wrap="square">
+            <a:spAutoFit/>
+          </a:bodyPr>
+          <a:lstStyle/>
+          <a:p>
+            <a:pPr algn="l"/>
+            <a:r>
+              <a:rPr sz="2800">
+                <a:solidFill>
+                  <a:srgbClr val="666666"/>
+                </a:solidFill>
+                <a:latin typeface="Poppins Medium"/>
+              </a:rPr>
+              <a:t>Lesson 5 of 8  ·  Building the RAG Assistant</a:t>
+            </a:r>
+          </a:p>
+        </p:txBody>
+      </p:sp>
+    </p:spTree>
+  </p:cSld>
+  <p:clrMapOvr>
+    <a:masterClrMapping/>
+  </p:clrMapOvr>
+</p:sld>
+</file>
+
+<file path=ppt/slides/slide2.xml><?xml version="1.0" encoding="utf-8"?>
+<p:sld xmlns:a="http://schemas.openxmlformats.org/drawingml/2006/main" xmlns:p="http://schemas.openxmlformats.org/presentationml/2006/main" xmlns:r="http://schemas.openxmlformats.org/officeDocument/2006/relationships">
+  <p:cSld>
+    <p:spTree>
+      <p:nvGrpSpPr>
+        <p:cNvPr id="1" name=""/>
+        <p:cNvGrpSpPr/>
+        <p:nvPr/>
+      </p:nvGrpSpPr>
+      <p:grpSpPr/>
+      <p:sp>
+        <p:nvSpPr>
           <p:cNvPr id="2" name="Rectangle 1"/>
           <p:cNvSpPr/>
           <p:nvPr/>
@@ -9601,1573 +9693,6 @@
                 <a:latin typeface="Poppins"/>
               </a:rPr>
               <a:t>8.  Ship it</a:t>
-            </a:r>
-          </a:p>
-        </p:txBody>
-      </p:sp>
-    </p:spTree>
-  </p:cSld>
-  <p:clrMapOvr>
-    <a:masterClrMapping/>
-  </p:clrMapOvr>
-</p:sld>
-</file>
-
-<file path=ppt/slides/slide2.xml><?xml version="1.0" encoding="utf-8"?>
-<p:sld xmlns:a="http://schemas.openxmlformats.org/drawingml/2006/main" xmlns:p="http://schemas.openxmlformats.org/presentationml/2006/main" xmlns:r="http://schemas.openxmlformats.org/officeDocument/2006/relationships">
-  <p:cSld>
-    <p:spTree>
-      <p:nvGrpSpPr>
-        <p:cNvPr id="1" name=""/>
-        <p:cNvGrpSpPr/>
-        <p:nvPr/>
-      </p:nvGrpSpPr>
-      <p:grpSpPr/>
-      <p:sp>
-        <p:nvSpPr>
-          <p:cNvPr id="2" name="TextBox 1"/>
-          <p:cNvSpPr txBox="1"/>
-          <p:nvPr/>
-        </p:nvSpPr>
-        <p:spPr>
-          <a:xfrm>
-            <a:off x="1069848" y="822960"/>
-            <a:ext cx="14630400" cy="914400"/>
-          </a:xfrm>
-          <a:prstGeom prst="rect">
-            <a:avLst/>
-          </a:prstGeom>
-          <a:noFill/>
-        </p:spPr>
-        <p:txBody>
-          <a:bodyPr wrap="square">
-            <a:spAutoFit/>
-          </a:bodyPr>
-          <a:lstStyle/>
-          <a:p>
-            <a:pPr algn="l"/>
-            <a:r>
-              <a:rPr sz="5000">
-                <a:solidFill>
-                  <a:srgbClr val="3627FC"/>
-                </a:solidFill>
-                <a:latin typeface="Poppins ExtraBold"/>
-              </a:rPr>
-              <a:t>Where we are</a:t>
-            </a:r>
-          </a:p>
-        </p:txBody>
-      </p:sp>
-      <p:sp>
-        <p:nvSpPr>
-          <p:cNvPr id="3" name="Rectangle 2"/>
-          <p:cNvSpPr/>
-          <p:nvPr/>
-        </p:nvSpPr>
-        <p:spPr>
-          <a:xfrm>
-            <a:off x="960119" y="3154679"/>
-            <a:ext cx="10019211" cy="566928"/>
-          </a:xfrm>
-          <a:prstGeom prst="rect">
-            <a:avLst/>
-          </a:prstGeom>
-          <a:solidFill>
-            <a:srgbClr val="F3F3F3"/>
-          </a:solidFill>
-          <a:ln>
-            <a:noFill/>
-          </a:ln>
-          <a:effectLst/>
-        </p:spPr>
-        <p:style>
-          <a:lnRef idx="1">
-            <a:schemeClr val="accent1"/>
-          </a:lnRef>
-          <a:fillRef idx="3">
-            <a:schemeClr val="accent1"/>
-          </a:fillRef>
-          <a:effectRef idx="2">
-            <a:schemeClr val="accent1"/>
-          </a:effectRef>
-          <a:fontRef idx="minor">
-            <a:schemeClr val="lt1"/>
-          </a:fontRef>
-        </p:style>
-        <p:txBody>
-          <a:bodyPr rtlCol="0" anchor="ctr"/>
-          <a:lstStyle/>
-          <a:p>
-            <a:pPr algn="ctr"/>
-          </a:p>
-        </p:txBody>
-      </p:sp>
-      <p:sp>
-        <p:nvSpPr>
-          <p:cNvPr id="4" name="TextBox 3"/>
-          <p:cNvSpPr txBox="1"/>
-          <p:nvPr/>
-        </p:nvSpPr>
-        <p:spPr>
-          <a:xfrm>
-            <a:off x="960119" y="3218687"/>
-            <a:ext cx="10019211" cy="457200"/>
-          </a:xfrm>
-          <a:prstGeom prst="rect">
-            <a:avLst/>
-          </a:prstGeom>
-          <a:noFill/>
-        </p:spPr>
-        <p:txBody>
-          <a:bodyPr wrap="square">
-            <a:spAutoFit/>
-          </a:bodyPr>
-          <a:lstStyle/>
-          <a:p>
-            <a:pPr algn="ctr"/>
-            <a:r>
-              <a:rPr sz="1600">
-                <a:solidFill>
-                  <a:srgbClr val="666666"/>
-                </a:solidFill>
-                <a:latin typeface="Poppins Medium"/>
-              </a:rPr>
-              <a:t>EXPLORE</a:t>
-            </a:r>
-          </a:p>
-        </p:txBody>
-      </p:sp>
-      <p:sp>
-        <p:nvSpPr>
-          <p:cNvPr id="5" name="Rectangle 4"/>
-          <p:cNvSpPr/>
-          <p:nvPr/>
-        </p:nvSpPr>
-        <p:spPr>
-          <a:xfrm>
-            <a:off x="11541034" y="3154679"/>
-            <a:ext cx="1554480" cy="566928"/>
-          </a:xfrm>
-          <a:prstGeom prst="rect">
-            <a:avLst/>
-          </a:prstGeom>
-          <a:solidFill>
-            <a:srgbClr val="F3F3F3"/>
-          </a:solidFill>
-          <a:ln>
-            <a:noFill/>
-          </a:ln>
-          <a:effectLst/>
-        </p:spPr>
-        <p:style>
-          <a:lnRef idx="1">
-            <a:schemeClr val="accent1"/>
-          </a:lnRef>
-          <a:fillRef idx="3">
-            <a:schemeClr val="accent1"/>
-          </a:fillRef>
-          <a:effectRef idx="2">
-            <a:schemeClr val="accent1"/>
-          </a:effectRef>
-          <a:fontRef idx="minor">
-            <a:schemeClr val="lt1"/>
-          </a:fontRef>
-        </p:style>
-        <p:txBody>
-          <a:bodyPr rtlCol="0" anchor="ctr"/>
-          <a:lstStyle/>
-          <a:p>
-            <a:pPr algn="ctr"/>
-          </a:p>
-        </p:txBody>
-      </p:sp>
-      <p:sp>
-        <p:nvSpPr>
-          <p:cNvPr id="6" name="TextBox 5"/>
-          <p:cNvSpPr txBox="1"/>
-          <p:nvPr/>
-        </p:nvSpPr>
-        <p:spPr>
-          <a:xfrm>
-            <a:off x="11541034" y="3218687"/>
-            <a:ext cx="1554480" cy="457200"/>
-          </a:xfrm>
-          <a:prstGeom prst="rect">
-            <a:avLst/>
-          </a:prstGeom>
-          <a:noFill/>
-        </p:spPr>
-        <p:txBody>
-          <a:bodyPr wrap="square">
-            <a:spAutoFit/>
-          </a:bodyPr>
-          <a:lstStyle/>
-          <a:p>
-            <a:pPr algn="ctr"/>
-            <a:r>
-              <a:rPr sz="1600">
-                <a:solidFill>
-                  <a:srgbClr val="666666"/>
-                </a:solidFill>
-                <a:latin typeface="Poppins Medium"/>
-              </a:rPr>
-              <a:t>BUILD</a:t>
-            </a:r>
-          </a:p>
-        </p:txBody>
-      </p:sp>
-      <p:sp>
-        <p:nvSpPr>
-          <p:cNvPr id="7" name="Rectangle 6"/>
-          <p:cNvSpPr/>
-          <p:nvPr/>
-        </p:nvSpPr>
-        <p:spPr>
-          <a:xfrm>
-            <a:off x="13657217" y="3154679"/>
-            <a:ext cx="3670662" cy="566928"/>
-          </a:xfrm>
-          <a:prstGeom prst="rect">
-            <a:avLst/>
-          </a:prstGeom>
-          <a:solidFill>
-            <a:srgbClr val="F3F3F3"/>
-          </a:solidFill>
-          <a:ln>
-            <a:noFill/>
-          </a:ln>
-          <a:effectLst/>
-        </p:spPr>
-        <p:style>
-          <a:lnRef idx="1">
-            <a:schemeClr val="accent1"/>
-          </a:lnRef>
-          <a:fillRef idx="3">
-            <a:schemeClr val="accent1"/>
-          </a:fillRef>
-          <a:effectRef idx="2">
-            <a:schemeClr val="accent1"/>
-          </a:effectRef>
-          <a:fontRef idx="minor">
-            <a:schemeClr val="lt1"/>
-          </a:fontRef>
-        </p:style>
-        <p:txBody>
-          <a:bodyPr rtlCol="0" anchor="ctr"/>
-          <a:lstStyle/>
-          <a:p>
-            <a:pPr algn="ctr"/>
-          </a:p>
-        </p:txBody>
-      </p:sp>
-      <p:sp>
-        <p:nvSpPr>
-          <p:cNvPr id="8" name="TextBox 7"/>
-          <p:cNvSpPr txBox="1"/>
-          <p:nvPr/>
-        </p:nvSpPr>
-        <p:spPr>
-          <a:xfrm>
-            <a:off x="13657217" y="3218687"/>
-            <a:ext cx="3670662" cy="457200"/>
-          </a:xfrm>
-          <a:prstGeom prst="rect">
-            <a:avLst/>
-          </a:prstGeom>
-          <a:noFill/>
-        </p:spPr>
-        <p:txBody>
-          <a:bodyPr wrap="square">
-            <a:spAutoFit/>
-          </a:bodyPr>
-          <a:lstStyle/>
-          <a:p>
-            <a:pPr algn="ctr"/>
-            <a:r>
-              <a:rPr sz="1600">
-                <a:solidFill>
-                  <a:srgbClr val="666666"/>
-                </a:solidFill>
-                <a:latin typeface="Poppins Medium"/>
-              </a:rPr>
-              <a:t>FINISH</a:t>
-            </a:r>
-          </a:p>
-        </p:txBody>
-      </p:sp>
-      <p:sp>
-        <p:nvSpPr>
-          <p:cNvPr id="9" name="Rectangle 8"/>
-          <p:cNvSpPr/>
-          <p:nvPr/>
-        </p:nvSpPr>
-        <p:spPr>
-          <a:xfrm>
-            <a:off x="1737360" y="5093207"/>
-            <a:ext cx="14813280" cy="54864"/>
-          </a:xfrm>
-          <a:prstGeom prst="rect">
-            <a:avLst/>
-          </a:prstGeom>
-          <a:solidFill>
-            <a:srgbClr val="F3F3F3"/>
-          </a:solidFill>
-          <a:ln>
-            <a:noFill/>
-          </a:ln>
-          <a:effectLst/>
-        </p:spPr>
-        <p:style>
-          <a:lnRef idx="1">
-            <a:schemeClr val="accent1"/>
-          </a:lnRef>
-          <a:fillRef idx="3">
-            <a:schemeClr val="accent1"/>
-          </a:fillRef>
-          <a:effectRef idx="2">
-            <a:schemeClr val="accent1"/>
-          </a:effectRef>
-          <a:fontRef idx="minor">
-            <a:schemeClr val="lt1"/>
-          </a:fontRef>
-        </p:style>
-        <p:txBody>
-          <a:bodyPr rtlCol="0" anchor="ctr"/>
-          <a:lstStyle/>
-          <a:p>
-            <a:pPr algn="ctr"/>
-          </a:p>
-        </p:txBody>
-      </p:sp>
-      <p:sp>
-        <p:nvSpPr>
-          <p:cNvPr id="10" name="Oval 9"/>
-          <p:cNvSpPr/>
-          <p:nvPr/>
-        </p:nvSpPr>
-        <p:spPr>
-          <a:xfrm>
-            <a:off x="1371600" y="4754879"/>
-            <a:ext cx="731520" cy="731520"/>
-          </a:xfrm>
-          <a:prstGeom prst="ellipse">
-            <a:avLst/>
-          </a:prstGeom>
-          <a:solidFill>
-            <a:srgbClr val="31C59E"/>
-          </a:solidFill>
-          <a:ln>
-            <a:noFill/>
-          </a:ln>
-          <a:effectLst/>
-        </p:spPr>
-        <p:style>
-          <a:lnRef idx="1">
-            <a:schemeClr val="accent1"/>
-          </a:lnRef>
-          <a:fillRef idx="3">
-            <a:schemeClr val="accent1"/>
-          </a:fillRef>
-          <a:effectRef idx="2">
-            <a:schemeClr val="accent1"/>
-          </a:effectRef>
-          <a:fontRef idx="minor">
-            <a:schemeClr val="lt1"/>
-          </a:fontRef>
-        </p:style>
-        <p:txBody>
-          <a:bodyPr rtlCol="0" anchor="ctr"/>
-          <a:lstStyle/>
-          <a:p>
-            <a:pPr algn="ctr"/>
-          </a:p>
-        </p:txBody>
-      </p:sp>
-      <p:sp>
-        <p:nvSpPr>
-          <p:cNvPr id="11" name="TextBox 10"/>
-          <p:cNvSpPr txBox="1"/>
-          <p:nvPr/>
-        </p:nvSpPr>
-        <p:spPr>
-          <a:xfrm>
-            <a:off x="1280160" y="4864607"/>
-            <a:ext cx="914400" cy="457200"/>
-          </a:xfrm>
-          <a:prstGeom prst="rect">
-            <a:avLst/>
-          </a:prstGeom>
-          <a:noFill/>
-        </p:spPr>
-        <p:txBody>
-          <a:bodyPr wrap="square">
-            <a:spAutoFit/>
-          </a:bodyPr>
-          <a:lstStyle/>
-          <a:p>
-            <a:pPr algn="ctr"/>
-            <a:r>
-              <a:rPr sz="2400">
-                <a:solidFill>
-                  <a:srgbClr val="FFFFFF"/>
-                </a:solidFill>
-                <a:latin typeface="Poppins ExtraBold"/>
-              </a:rPr>
-              <a:t>1</a:t>
-            </a:r>
-          </a:p>
-        </p:txBody>
-      </p:sp>
-      <p:sp>
-        <p:nvSpPr>
-          <p:cNvPr id="12" name="TextBox 11"/>
-          <p:cNvSpPr txBox="1"/>
-          <p:nvPr/>
-        </p:nvSpPr>
-        <p:spPr>
-          <a:xfrm>
-            <a:off x="685800" y="3886200"/>
-            <a:ext cx="2103120" cy="457200"/>
-          </a:xfrm>
-          <a:prstGeom prst="rect">
-            <a:avLst/>
-          </a:prstGeom>
-          <a:noFill/>
-        </p:spPr>
-        <p:txBody>
-          <a:bodyPr wrap="square">
-            <a:spAutoFit/>
-          </a:bodyPr>
-          <a:lstStyle/>
-          <a:p>
-            <a:pPr algn="ctr"/>
-            <a:r>
-              <a:rPr sz="1900">
-                <a:solidFill>
-                  <a:srgbClr val="434343"/>
-                </a:solidFill>
-                <a:latin typeface="Poppins ExtraBold"/>
-              </a:rPr>
-              <a:t>Setup</a:t>
-            </a:r>
-          </a:p>
-        </p:txBody>
-      </p:sp>
-      <p:sp>
-        <p:nvSpPr>
-          <p:cNvPr id="13" name="TextBox 12"/>
-          <p:cNvSpPr txBox="1"/>
-          <p:nvPr/>
-        </p:nvSpPr>
-        <p:spPr>
-          <a:xfrm>
-            <a:off x="502919" y="4251959"/>
-            <a:ext cx="2468880" cy="822960"/>
-          </a:xfrm>
-          <a:prstGeom prst="rect">
-            <a:avLst/>
-          </a:prstGeom>
-          <a:noFill/>
-        </p:spPr>
-        <p:txBody>
-          <a:bodyPr wrap="square">
-            <a:spAutoFit/>
-          </a:bodyPr>
-          <a:lstStyle/>
-          <a:p>
-            <a:pPr algn="ctr"/>
-            <a:r>
-              <a:rPr sz="1200">
-                <a:solidFill>
-                  <a:srgbClr val="666666"/>
-                </a:solidFill>
-                <a:latin typeface="Poppins"/>
-              </a:rPr>
-              <a:t>Your first AI call, and system prompts</a:t>
-            </a:r>
-          </a:p>
-        </p:txBody>
-      </p:sp>
-      <p:sp>
-        <p:nvSpPr>
-          <p:cNvPr id="14" name="Oval 13"/>
-          <p:cNvSpPr/>
-          <p:nvPr/>
-        </p:nvSpPr>
-        <p:spPr>
-          <a:xfrm>
-            <a:off x="3487782" y="4754879"/>
-            <a:ext cx="731520" cy="731520"/>
-          </a:xfrm>
-          <a:prstGeom prst="ellipse">
-            <a:avLst/>
-          </a:prstGeom>
-          <a:solidFill>
-            <a:srgbClr val="31C59E"/>
-          </a:solidFill>
-          <a:ln>
-            <a:noFill/>
-          </a:ln>
-          <a:effectLst/>
-        </p:spPr>
-        <p:style>
-          <a:lnRef idx="1">
-            <a:schemeClr val="accent1"/>
-          </a:lnRef>
-          <a:fillRef idx="3">
-            <a:schemeClr val="accent1"/>
-          </a:fillRef>
-          <a:effectRef idx="2">
-            <a:schemeClr val="accent1"/>
-          </a:effectRef>
-          <a:fontRef idx="minor">
-            <a:schemeClr val="lt1"/>
-          </a:fontRef>
-        </p:style>
-        <p:txBody>
-          <a:bodyPr rtlCol="0" anchor="ctr"/>
-          <a:lstStyle/>
-          <a:p>
-            <a:pPr algn="ctr"/>
-          </a:p>
-        </p:txBody>
-      </p:sp>
-      <p:sp>
-        <p:nvSpPr>
-          <p:cNvPr id="15" name="TextBox 14"/>
-          <p:cNvSpPr txBox="1"/>
-          <p:nvPr/>
-        </p:nvSpPr>
-        <p:spPr>
-          <a:xfrm>
-            <a:off x="3396342" y="4864607"/>
-            <a:ext cx="914400" cy="457200"/>
-          </a:xfrm>
-          <a:prstGeom prst="rect">
-            <a:avLst/>
-          </a:prstGeom>
-          <a:noFill/>
-        </p:spPr>
-        <p:txBody>
-          <a:bodyPr wrap="square">
-            <a:spAutoFit/>
-          </a:bodyPr>
-          <a:lstStyle/>
-          <a:p>
-            <a:pPr algn="ctr"/>
-            <a:r>
-              <a:rPr sz="2400">
-                <a:solidFill>
-                  <a:srgbClr val="FFFFFF"/>
-                </a:solidFill>
-                <a:latin typeface="Poppins ExtraBold"/>
-              </a:rPr>
-              <a:t>2</a:t>
-            </a:r>
-          </a:p>
-        </p:txBody>
-      </p:sp>
-      <p:sp>
-        <p:nvSpPr>
-          <p:cNvPr id="16" name="TextBox 15"/>
-          <p:cNvSpPr txBox="1"/>
-          <p:nvPr/>
-        </p:nvSpPr>
-        <p:spPr>
-          <a:xfrm>
-            <a:off x="2801982" y="5806440"/>
-            <a:ext cx="2103120" cy="457200"/>
-          </a:xfrm>
-          <a:prstGeom prst="rect">
-            <a:avLst/>
-          </a:prstGeom>
-          <a:noFill/>
-        </p:spPr>
-        <p:txBody>
-          <a:bodyPr wrap="square">
-            <a:spAutoFit/>
-          </a:bodyPr>
-          <a:lstStyle/>
-          <a:p>
-            <a:pPr algn="ctr"/>
-            <a:r>
-              <a:rPr sz="1900">
-                <a:solidFill>
-                  <a:srgbClr val="434343"/>
-                </a:solidFill>
-                <a:latin typeface="Poppins ExtraBold"/>
-              </a:rPr>
-              <a:t>Why AI invents</a:t>
-            </a:r>
-          </a:p>
-        </p:txBody>
-      </p:sp>
-      <p:sp>
-        <p:nvSpPr>
-          <p:cNvPr id="17" name="TextBox 16"/>
-          <p:cNvSpPr txBox="1"/>
-          <p:nvPr/>
-        </p:nvSpPr>
-        <p:spPr>
-          <a:xfrm>
-            <a:off x="2619102" y="6217920"/>
-            <a:ext cx="2468880" cy="822960"/>
-          </a:xfrm>
-          <a:prstGeom prst="rect">
-            <a:avLst/>
-          </a:prstGeom>
-          <a:noFill/>
-        </p:spPr>
-        <p:txBody>
-          <a:bodyPr wrap="square">
-            <a:spAutoFit/>
-          </a:bodyPr>
-          <a:lstStyle/>
-          <a:p>
-            <a:pPr algn="ctr"/>
-            <a:r>
-              <a:rPr sz="1200">
-                <a:solidFill>
-                  <a:srgbClr val="666666"/>
-                </a:solidFill>
-                <a:latin typeface="Poppins"/>
-              </a:rPr>
-              <a:t>Why it makes things up, and why pasting everything fails</a:t>
-            </a:r>
-          </a:p>
-        </p:txBody>
-      </p:sp>
-      <p:sp>
-        <p:nvSpPr>
-          <p:cNvPr id="18" name="Oval 17"/>
-          <p:cNvSpPr/>
-          <p:nvPr/>
-        </p:nvSpPr>
-        <p:spPr>
-          <a:xfrm>
-            <a:off x="5603965" y="4754879"/>
-            <a:ext cx="731520" cy="731520"/>
-          </a:xfrm>
-          <a:prstGeom prst="ellipse">
-            <a:avLst/>
-          </a:prstGeom>
-          <a:solidFill>
-            <a:srgbClr val="31C59E"/>
-          </a:solidFill>
-          <a:ln>
-            <a:noFill/>
-          </a:ln>
-          <a:effectLst/>
-        </p:spPr>
-        <p:style>
-          <a:lnRef idx="1">
-            <a:schemeClr val="accent1"/>
-          </a:lnRef>
-          <a:fillRef idx="3">
-            <a:schemeClr val="accent1"/>
-          </a:fillRef>
-          <a:effectRef idx="2">
-            <a:schemeClr val="accent1"/>
-          </a:effectRef>
-          <a:fontRef idx="minor">
-            <a:schemeClr val="lt1"/>
-          </a:fontRef>
-        </p:style>
-        <p:txBody>
-          <a:bodyPr rtlCol="0" anchor="ctr"/>
-          <a:lstStyle/>
-          <a:p>
-            <a:pPr algn="ctr"/>
-          </a:p>
-        </p:txBody>
-      </p:sp>
-      <p:sp>
-        <p:nvSpPr>
-          <p:cNvPr id="19" name="TextBox 18"/>
-          <p:cNvSpPr txBox="1"/>
-          <p:nvPr/>
-        </p:nvSpPr>
-        <p:spPr>
-          <a:xfrm>
-            <a:off x="5512525" y="4864607"/>
-            <a:ext cx="914400" cy="457200"/>
-          </a:xfrm>
-          <a:prstGeom prst="rect">
-            <a:avLst/>
-          </a:prstGeom>
-          <a:noFill/>
-        </p:spPr>
-        <p:txBody>
-          <a:bodyPr wrap="square">
-            <a:spAutoFit/>
-          </a:bodyPr>
-          <a:lstStyle/>
-          <a:p>
-            <a:pPr algn="ctr"/>
-            <a:r>
-              <a:rPr sz="2400">
-                <a:solidFill>
-                  <a:srgbClr val="FFFFFF"/>
-                </a:solidFill>
-                <a:latin typeface="Poppins ExtraBold"/>
-              </a:rPr>
-              <a:t>3</a:t>
-            </a:r>
-          </a:p>
-        </p:txBody>
-      </p:sp>
-      <p:sp>
-        <p:nvSpPr>
-          <p:cNvPr id="20" name="TextBox 19"/>
-          <p:cNvSpPr txBox="1"/>
-          <p:nvPr/>
-        </p:nvSpPr>
-        <p:spPr>
-          <a:xfrm>
-            <a:off x="4918165" y="3886200"/>
-            <a:ext cx="2103120" cy="457200"/>
-          </a:xfrm>
-          <a:prstGeom prst="rect">
-            <a:avLst/>
-          </a:prstGeom>
-          <a:noFill/>
-        </p:spPr>
-        <p:txBody>
-          <a:bodyPr wrap="square">
-            <a:spAutoFit/>
-          </a:bodyPr>
-          <a:lstStyle/>
-          <a:p>
-            <a:pPr algn="ctr"/>
-            <a:r>
-              <a:rPr sz="1900">
-                <a:solidFill>
-                  <a:srgbClr val="434343"/>
-                </a:solidFill>
-                <a:latin typeface="Poppins ExtraBold"/>
-              </a:rPr>
-              <a:t>Chunking</a:t>
-            </a:r>
-          </a:p>
-        </p:txBody>
-      </p:sp>
-      <p:sp>
-        <p:nvSpPr>
-          <p:cNvPr id="21" name="TextBox 20"/>
-          <p:cNvSpPr txBox="1"/>
-          <p:nvPr/>
-        </p:nvSpPr>
-        <p:spPr>
-          <a:xfrm>
-            <a:off x="4735285" y="4251959"/>
-            <a:ext cx="2468880" cy="822960"/>
-          </a:xfrm>
-          <a:prstGeom prst="rect">
-            <a:avLst/>
-          </a:prstGeom>
-          <a:noFill/>
-        </p:spPr>
-        <p:txBody>
-          <a:bodyPr wrap="square">
-            <a:spAutoFit/>
-          </a:bodyPr>
-          <a:lstStyle/>
-          <a:p>
-            <a:pPr algn="ctr"/>
-            <a:r>
-              <a:rPr sz="1200">
-                <a:solidFill>
-                  <a:srgbClr val="666666"/>
-                </a:solidFill>
-                <a:latin typeface="Poppins"/>
-              </a:rPr>
-              <a:t>Splitting documents so they can be searched</a:t>
-            </a:r>
-          </a:p>
-        </p:txBody>
-      </p:sp>
-      <p:sp>
-        <p:nvSpPr>
-          <p:cNvPr id="22" name="Oval 21"/>
-          <p:cNvSpPr/>
-          <p:nvPr/>
-        </p:nvSpPr>
-        <p:spPr>
-          <a:xfrm>
-            <a:off x="7720148" y="4754879"/>
-            <a:ext cx="731520" cy="731520"/>
-          </a:xfrm>
-          <a:prstGeom prst="ellipse">
-            <a:avLst/>
-          </a:prstGeom>
-          <a:solidFill>
-            <a:srgbClr val="31C59E"/>
-          </a:solidFill>
-          <a:ln>
-            <a:noFill/>
-          </a:ln>
-          <a:effectLst/>
-        </p:spPr>
-        <p:style>
-          <a:lnRef idx="1">
-            <a:schemeClr val="accent1"/>
-          </a:lnRef>
-          <a:fillRef idx="3">
-            <a:schemeClr val="accent1"/>
-          </a:fillRef>
-          <a:effectRef idx="2">
-            <a:schemeClr val="accent1"/>
-          </a:effectRef>
-          <a:fontRef idx="minor">
-            <a:schemeClr val="lt1"/>
-          </a:fontRef>
-        </p:style>
-        <p:txBody>
-          <a:bodyPr rtlCol="0" anchor="ctr"/>
-          <a:lstStyle/>
-          <a:p>
-            <a:pPr algn="ctr"/>
-          </a:p>
-        </p:txBody>
-      </p:sp>
-      <p:sp>
-        <p:nvSpPr>
-          <p:cNvPr id="23" name="TextBox 22"/>
-          <p:cNvSpPr txBox="1"/>
-          <p:nvPr/>
-        </p:nvSpPr>
-        <p:spPr>
-          <a:xfrm>
-            <a:off x="7628708" y="4864607"/>
-            <a:ext cx="914400" cy="457200"/>
-          </a:xfrm>
-          <a:prstGeom prst="rect">
-            <a:avLst/>
-          </a:prstGeom>
-          <a:noFill/>
-        </p:spPr>
-        <p:txBody>
-          <a:bodyPr wrap="square">
-            <a:spAutoFit/>
-          </a:bodyPr>
-          <a:lstStyle/>
-          <a:p>
-            <a:pPr algn="ctr"/>
-            <a:r>
-              <a:rPr sz="2400">
-                <a:solidFill>
-                  <a:srgbClr val="FFFFFF"/>
-                </a:solidFill>
-                <a:latin typeface="Poppins ExtraBold"/>
-              </a:rPr>
-              <a:t>4</a:t>
-            </a:r>
-          </a:p>
-        </p:txBody>
-      </p:sp>
-      <p:sp>
-        <p:nvSpPr>
-          <p:cNvPr id="24" name="TextBox 23"/>
-          <p:cNvSpPr txBox="1"/>
-          <p:nvPr/>
-        </p:nvSpPr>
-        <p:spPr>
-          <a:xfrm>
-            <a:off x="7034348" y="5806440"/>
-            <a:ext cx="2103120" cy="457200"/>
-          </a:xfrm>
-          <a:prstGeom prst="rect">
-            <a:avLst/>
-          </a:prstGeom>
-          <a:noFill/>
-        </p:spPr>
-        <p:txBody>
-          <a:bodyPr wrap="square">
-            <a:spAutoFit/>
-          </a:bodyPr>
-          <a:lstStyle/>
-          <a:p>
-            <a:pPr algn="ctr"/>
-            <a:r>
-              <a:rPr sz="1900">
-                <a:solidFill>
-                  <a:srgbClr val="434343"/>
-                </a:solidFill>
-                <a:latin typeface="Poppins ExtraBold"/>
-              </a:rPr>
-              <a:t>Embeddings</a:t>
-            </a:r>
-          </a:p>
-        </p:txBody>
-      </p:sp>
-      <p:sp>
-        <p:nvSpPr>
-          <p:cNvPr id="25" name="TextBox 24"/>
-          <p:cNvSpPr txBox="1"/>
-          <p:nvPr/>
-        </p:nvSpPr>
-        <p:spPr>
-          <a:xfrm>
-            <a:off x="6851468" y="6217920"/>
-            <a:ext cx="2468880" cy="822960"/>
-          </a:xfrm>
-          <a:prstGeom prst="rect">
-            <a:avLst/>
-          </a:prstGeom>
-          <a:noFill/>
-        </p:spPr>
-        <p:txBody>
-          <a:bodyPr wrap="square">
-            <a:spAutoFit/>
-          </a:bodyPr>
-          <a:lstStyle/>
-          <a:p>
-            <a:pPr algn="ctr"/>
-            <a:r>
-              <a:rPr sz="1200">
-                <a:solidFill>
-                  <a:srgbClr val="666666"/>
-                </a:solidFill>
-                <a:latin typeface="Poppins"/>
-              </a:rPr>
-              <a:t>Turning meaning into numbers you can compare</a:t>
-            </a:r>
-          </a:p>
-        </p:txBody>
-      </p:sp>
-      <p:sp>
-        <p:nvSpPr>
-          <p:cNvPr id="26" name="Oval 25"/>
-          <p:cNvSpPr/>
-          <p:nvPr/>
-        </p:nvSpPr>
-        <p:spPr>
-          <a:xfrm>
-            <a:off x="9744891" y="4663440"/>
-            <a:ext cx="914400" cy="914400"/>
-          </a:xfrm>
-          <a:prstGeom prst="ellipse">
-            <a:avLst/>
-          </a:prstGeom>
-          <a:solidFill>
-            <a:srgbClr val="3627FC"/>
-          </a:solidFill>
-          <a:ln>
-            <a:noFill/>
-          </a:ln>
-          <a:effectLst/>
-        </p:spPr>
-        <p:style>
-          <a:lnRef idx="1">
-            <a:schemeClr val="accent1"/>
-          </a:lnRef>
-          <a:fillRef idx="3">
-            <a:schemeClr val="accent1"/>
-          </a:fillRef>
-          <a:effectRef idx="2">
-            <a:schemeClr val="accent1"/>
-          </a:effectRef>
-          <a:fontRef idx="minor">
-            <a:schemeClr val="lt1"/>
-          </a:fontRef>
-        </p:style>
-        <p:txBody>
-          <a:bodyPr rtlCol="0" anchor="ctr"/>
-          <a:lstStyle/>
-          <a:p>
-            <a:pPr algn="ctr"/>
-          </a:p>
-        </p:txBody>
-      </p:sp>
-      <p:sp>
-        <p:nvSpPr>
-          <p:cNvPr id="27" name="TextBox 26"/>
-          <p:cNvSpPr txBox="1"/>
-          <p:nvPr/>
-        </p:nvSpPr>
-        <p:spPr>
-          <a:xfrm>
-            <a:off x="9744891" y="4864607"/>
-            <a:ext cx="914400" cy="457200"/>
-          </a:xfrm>
-          <a:prstGeom prst="rect">
-            <a:avLst/>
-          </a:prstGeom>
-          <a:noFill/>
-        </p:spPr>
-        <p:txBody>
-          <a:bodyPr wrap="square">
-            <a:spAutoFit/>
-          </a:bodyPr>
-          <a:lstStyle/>
-          <a:p>
-            <a:pPr algn="ctr"/>
-            <a:r>
-              <a:rPr sz="2400">
-                <a:solidFill>
-                  <a:srgbClr val="FFFFFF"/>
-                </a:solidFill>
-                <a:latin typeface="Poppins ExtraBold"/>
-              </a:rPr>
-              <a:t>5</a:t>
-            </a:r>
-          </a:p>
-        </p:txBody>
-      </p:sp>
-      <p:sp>
-        <p:nvSpPr>
-          <p:cNvPr id="28" name="TextBox 27"/>
-          <p:cNvSpPr txBox="1"/>
-          <p:nvPr/>
-        </p:nvSpPr>
-        <p:spPr>
-          <a:xfrm>
-            <a:off x="9150531" y="3886200"/>
-            <a:ext cx="2103120" cy="457200"/>
-          </a:xfrm>
-          <a:prstGeom prst="rect">
-            <a:avLst/>
-          </a:prstGeom>
-          <a:noFill/>
-        </p:spPr>
-        <p:txBody>
-          <a:bodyPr wrap="square">
-            <a:spAutoFit/>
-          </a:bodyPr>
-          <a:lstStyle/>
-          <a:p>
-            <a:pPr algn="ctr"/>
-            <a:r>
-              <a:rPr sz="1900">
-                <a:solidFill>
-                  <a:srgbClr val="3627FC"/>
-                </a:solidFill>
-                <a:latin typeface="Poppins ExtraBold"/>
-              </a:rPr>
-              <a:t>The assistant</a:t>
-            </a:r>
-          </a:p>
-        </p:txBody>
-      </p:sp>
-      <p:sp>
-        <p:nvSpPr>
-          <p:cNvPr id="29" name="TextBox 28"/>
-          <p:cNvSpPr txBox="1"/>
-          <p:nvPr/>
-        </p:nvSpPr>
-        <p:spPr>
-          <a:xfrm>
-            <a:off x="8967651" y="4251959"/>
-            <a:ext cx="2468880" cy="822960"/>
-          </a:xfrm>
-          <a:prstGeom prst="rect">
-            <a:avLst/>
-          </a:prstGeom>
-          <a:noFill/>
-        </p:spPr>
-        <p:txBody>
-          <a:bodyPr wrap="square">
-            <a:spAutoFit/>
-          </a:bodyPr>
-          <a:lstStyle/>
-          <a:p>
-            <a:pPr algn="ctr"/>
-            <a:r>
-              <a:rPr sz="1200">
-                <a:solidFill>
-                  <a:srgbClr val="666666"/>
-                </a:solidFill>
-                <a:latin typeface="Poppins"/>
-              </a:rPr>
-              <a:t>Retrieval + prompt = grounded answers</a:t>
-            </a:r>
-          </a:p>
-        </p:txBody>
-      </p:sp>
-      <p:sp>
-        <p:nvSpPr>
-          <p:cNvPr id="30" name="Oval 29"/>
-          <p:cNvSpPr/>
-          <p:nvPr/>
-        </p:nvSpPr>
-        <p:spPr>
-          <a:xfrm>
-            <a:off x="11952514" y="4754879"/>
-            <a:ext cx="731520" cy="731520"/>
-          </a:xfrm>
-          <a:prstGeom prst="ellipse">
-            <a:avLst/>
-          </a:prstGeom>
-          <a:solidFill>
-            <a:srgbClr val="FFFFFF"/>
-          </a:solidFill>
-          <a:ln w="25400">
-            <a:solidFill>
-              <a:srgbClr val="F3F3F3"/>
-            </a:solidFill>
-          </a:ln>
-          <a:effectLst/>
-        </p:spPr>
-        <p:style>
-          <a:lnRef idx="1">
-            <a:schemeClr val="accent1"/>
-          </a:lnRef>
-          <a:fillRef idx="3">
-            <a:schemeClr val="accent1"/>
-          </a:fillRef>
-          <a:effectRef idx="2">
-            <a:schemeClr val="accent1"/>
-          </a:effectRef>
-          <a:fontRef idx="minor">
-            <a:schemeClr val="lt1"/>
-          </a:fontRef>
-        </p:style>
-        <p:txBody>
-          <a:bodyPr rtlCol="0" anchor="ctr"/>
-          <a:lstStyle/>
-          <a:p>
-            <a:pPr algn="ctr"/>
-          </a:p>
-        </p:txBody>
-      </p:sp>
-      <p:sp>
-        <p:nvSpPr>
-          <p:cNvPr id="31" name="TextBox 30"/>
-          <p:cNvSpPr txBox="1"/>
-          <p:nvPr/>
-        </p:nvSpPr>
-        <p:spPr>
-          <a:xfrm>
-            <a:off x="11861074" y="4864607"/>
-            <a:ext cx="914400" cy="457200"/>
-          </a:xfrm>
-          <a:prstGeom prst="rect">
-            <a:avLst/>
-          </a:prstGeom>
-          <a:noFill/>
-        </p:spPr>
-        <p:txBody>
-          <a:bodyPr wrap="square">
-            <a:spAutoFit/>
-          </a:bodyPr>
-          <a:lstStyle/>
-          <a:p>
-            <a:pPr algn="ctr"/>
-            <a:r>
-              <a:rPr sz="2400">
-                <a:solidFill>
-                  <a:srgbClr val="666666"/>
-                </a:solidFill>
-                <a:latin typeface="Poppins ExtraBold"/>
-              </a:rPr>
-              <a:t>6</a:t>
-            </a:r>
-          </a:p>
-        </p:txBody>
-      </p:sp>
-      <p:sp>
-        <p:nvSpPr>
-          <p:cNvPr id="32" name="TextBox 31"/>
-          <p:cNvSpPr txBox="1"/>
-          <p:nvPr/>
-        </p:nvSpPr>
-        <p:spPr>
-          <a:xfrm>
-            <a:off x="11266714" y="5806440"/>
-            <a:ext cx="2103120" cy="457200"/>
-          </a:xfrm>
-          <a:prstGeom prst="rect">
-            <a:avLst/>
-          </a:prstGeom>
-          <a:noFill/>
-        </p:spPr>
-        <p:txBody>
-          <a:bodyPr wrap="square">
-            <a:spAutoFit/>
-          </a:bodyPr>
-          <a:lstStyle/>
-          <a:p>
-            <a:pPr algn="ctr"/>
-            <a:r>
-              <a:rPr sz="1900">
-                <a:solidFill>
-                  <a:srgbClr val="434343"/>
-                </a:solidFill>
-                <a:latin typeface="Poppins ExtraBold"/>
-              </a:rPr>
-              <a:t>Real project</a:t>
-            </a:r>
-          </a:p>
-        </p:txBody>
-      </p:sp>
-      <p:sp>
-        <p:nvSpPr>
-          <p:cNvPr id="33" name="TextBox 32"/>
-          <p:cNvSpPr txBox="1"/>
-          <p:nvPr/>
-        </p:nvSpPr>
-        <p:spPr>
-          <a:xfrm>
-            <a:off x="11083834" y="6217920"/>
-            <a:ext cx="2468880" cy="822960"/>
-          </a:xfrm>
-          <a:prstGeom prst="rect">
-            <a:avLst/>
-          </a:prstGeom>
-          <a:noFill/>
-        </p:spPr>
-        <p:txBody>
-          <a:bodyPr wrap="square">
-            <a:spAutoFit/>
-          </a:bodyPr>
-          <a:lstStyle/>
-          <a:p>
-            <a:pPr algn="ctr"/>
-            <a:r>
-              <a:rPr sz="1200">
-                <a:solidFill>
-                  <a:srgbClr val="666666"/>
-                </a:solidFill>
-                <a:latin typeface="Poppins"/>
-              </a:rPr>
-              <a:t>Out of the notebook, into Python files</a:t>
-            </a:r>
-          </a:p>
-        </p:txBody>
-      </p:sp>
-      <p:sp>
-        <p:nvSpPr>
-          <p:cNvPr id="34" name="Oval 33"/>
-          <p:cNvSpPr/>
-          <p:nvPr/>
-        </p:nvSpPr>
-        <p:spPr>
-          <a:xfrm>
-            <a:off x="14068697" y="4754879"/>
-            <a:ext cx="731520" cy="731520"/>
-          </a:xfrm>
-          <a:prstGeom prst="ellipse">
-            <a:avLst/>
-          </a:prstGeom>
-          <a:solidFill>
-            <a:srgbClr val="FFFFFF"/>
-          </a:solidFill>
-          <a:ln w="25400">
-            <a:solidFill>
-              <a:srgbClr val="F3F3F3"/>
-            </a:solidFill>
-          </a:ln>
-          <a:effectLst/>
-        </p:spPr>
-        <p:style>
-          <a:lnRef idx="1">
-            <a:schemeClr val="accent1"/>
-          </a:lnRef>
-          <a:fillRef idx="3">
-            <a:schemeClr val="accent1"/>
-          </a:fillRef>
-          <a:effectRef idx="2">
-            <a:schemeClr val="accent1"/>
-          </a:effectRef>
-          <a:fontRef idx="minor">
-            <a:schemeClr val="lt1"/>
-          </a:fontRef>
-        </p:style>
-        <p:txBody>
-          <a:bodyPr rtlCol="0" anchor="ctr"/>
-          <a:lstStyle/>
-          <a:p>
-            <a:pPr algn="ctr"/>
-          </a:p>
-        </p:txBody>
-      </p:sp>
-      <p:sp>
-        <p:nvSpPr>
-          <p:cNvPr id="35" name="TextBox 34"/>
-          <p:cNvSpPr txBox="1"/>
-          <p:nvPr/>
-        </p:nvSpPr>
-        <p:spPr>
-          <a:xfrm>
-            <a:off x="13977257" y="4864607"/>
-            <a:ext cx="914400" cy="457200"/>
-          </a:xfrm>
-          <a:prstGeom prst="rect">
-            <a:avLst/>
-          </a:prstGeom>
-          <a:noFill/>
-        </p:spPr>
-        <p:txBody>
-          <a:bodyPr wrap="square">
-            <a:spAutoFit/>
-          </a:bodyPr>
-          <a:lstStyle/>
-          <a:p>
-            <a:pPr algn="ctr"/>
-            <a:r>
-              <a:rPr sz="2400">
-                <a:solidFill>
-                  <a:srgbClr val="666666"/>
-                </a:solidFill>
-                <a:latin typeface="Poppins ExtraBold"/>
-              </a:rPr>
-              <a:t>7</a:t>
-            </a:r>
-          </a:p>
-        </p:txBody>
-      </p:sp>
-      <p:sp>
-        <p:nvSpPr>
-          <p:cNvPr id="36" name="TextBox 35"/>
-          <p:cNvSpPr txBox="1"/>
-          <p:nvPr/>
-        </p:nvSpPr>
-        <p:spPr>
-          <a:xfrm>
-            <a:off x="13382897" y="3886200"/>
-            <a:ext cx="2103120" cy="457200"/>
-          </a:xfrm>
-          <a:prstGeom prst="rect">
-            <a:avLst/>
-          </a:prstGeom>
-          <a:noFill/>
-        </p:spPr>
-        <p:txBody>
-          <a:bodyPr wrap="square">
-            <a:spAutoFit/>
-          </a:bodyPr>
-          <a:lstStyle/>
-          <a:p>
-            <a:pPr algn="ctr"/>
-            <a:r>
-              <a:rPr sz="1900">
-                <a:solidFill>
-                  <a:srgbClr val="434343"/>
-                </a:solidFill>
-                <a:latin typeface="Poppins ExtraBold"/>
-              </a:rPr>
-              <a:t>Your notes</a:t>
-            </a:r>
-          </a:p>
-        </p:txBody>
-      </p:sp>
-      <p:sp>
-        <p:nvSpPr>
-          <p:cNvPr id="37" name="TextBox 36"/>
-          <p:cNvSpPr txBox="1"/>
-          <p:nvPr/>
-        </p:nvSpPr>
-        <p:spPr>
-          <a:xfrm>
-            <a:off x="13200017" y="4251959"/>
-            <a:ext cx="2468880" cy="822960"/>
-          </a:xfrm>
-          <a:prstGeom prst="rect">
-            <a:avLst/>
-          </a:prstGeom>
-          <a:noFill/>
-        </p:spPr>
-        <p:txBody>
-          <a:bodyPr wrap="square">
-            <a:spAutoFit/>
-          </a:bodyPr>
-          <a:lstStyle/>
-          <a:p>
-            <a:pPr algn="ctr"/>
-            <a:r>
-              <a:rPr sz="1200">
-                <a:solidFill>
-                  <a:srgbClr val="666666"/>
-                </a:solidFill>
-                <a:latin typeface="Poppins"/>
-              </a:rPr>
-              <a:t>Your own documents, and fixing what goes wrong</a:t>
-            </a:r>
-          </a:p>
-        </p:txBody>
-      </p:sp>
-      <p:sp>
-        <p:nvSpPr>
-          <p:cNvPr id="38" name="Oval 37"/>
-          <p:cNvSpPr/>
-          <p:nvPr/>
-        </p:nvSpPr>
-        <p:spPr>
-          <a:xfrm>
-            <a:off x="16184880" y="4754879"/>
-            <a:ext cx="731520" cy="731520"/>
-          </a:xfrm>
-          <a:prstGeom prst="ellipse">
-            <a:avLst/>
-          </a:prstGeom>
-          <a:solidFill>
-            <a:srgbClr val="FFFFFF"/>
-          </a:solidFill>
-          <a:ln w="25400">
-            <a:solidFill>
-              <a:srgbClr val="F3F3F3"/>
-            </a:solidFill>
-          </a:ln>
-          <a:effectLst/>
-        </p:spPr>
-        <p:style>
-          <a:lnRef idx="1">
-            <a:schemeClr val="accent1"/>
-          </a:lnRef>
-          <a:fillRef idx="3">
-            <a:schemeClr val="accent1"/>
-          </a:fillRef>
-          <a:effectRef idx="2">
-            <a:schemeClr val="accent1"/>
-          </a:effectRef>
-          <a:fontRef idx="minor">
-            <a:schemeClr val="lt1"/>
-          </a:fontRef>
-        </p:style>
-        <p:txBody>
-          <a:bodyPr rtlCol="0" anchor="ctr"/>
-          <a:lstStyle/>
-          <a:p>
-            <a:pPr algn="ctr"/>
-          </a:p>
-        </p:txBody>
-      </p:sp>
-      <p:sp>
-        <p:nvSpPr>
-          <p:cNvPr id="39" name="TextBox 38"/>
-          <p:cNvSpPr txBox="1"/>
-          <p:nvPr/>
-        </p:nvSpPr>
-        <p:spPr>
-          <a:xfrm>
-            <a:off x="16093440" y="4864607"/>
-            <a:ext cx="914400" cy="457200"/>
-          </a:xfrm>
-          <a:prstGeom prst="rect">
-            <a:avLst/>
-          </a:prstGeom>
-          <a:noFill/>
-        </p:spPr>
-        <p:txBody>
-          <a:bodyPr wrap="square">
-            <a:spAutoFit/>
-          </a:bodyPr>
-          <a:lstStyle/>
-          <a:p>
-            <a:pPr algn="ctr"/>
-            <a:r>
-              <a:rPr sz="2400">
-                <a:solidFill>
-                  <a:srgbClr val="666666"/>
-                </a:solidFill>
-                <a:latin typeface="Poppins ExtraBold"/>
-              </a:rPr>
-              <a:t>8</a:t>
-            </a:r>
-          </a:p>
-        </p:txBody>
-      </p:sp>
-      <p:sp>
-        <p:nvSpPr>
-          <p:cNvPr id="40" name="TextBox 39"/>
-          <p:cNvSpPr txBox="1"/>
-          <p:nvPr/>
-        </p:nvSpPr>
-        <p:spPr>
-          <a:xfrm>
-            <a:off x="15499080" y="5806440"/>
-            <a:ext cx="2103120" cy="457200"/>
-          </a:xfrm>
-          <a:prstGeom prst="rect">
-            <a:avLst/>
-          </a:prstGeom>
-          <a:noFill/>
-        </p:spPr>
-        <p:txBody>
-          <a:bodyPr wrap="square">
-            <a:spAutoFit/>
-          </a:bodyPr>
-          <a:lstStyle/>
-          <a:p>
-            <a:pPr algn="ctr"/>
-            <a:r>
-              <a:rPr sz="1900">
-                <a:solidFill>
-                  <a:srgbClr val="434343"/>
-                </a:solidFill>
-                <a:latin typeface="Poppins ExtraBold"/>
-              </a:rPr>
-              <a:t>Ship it</a:t>
-            </a:r>
-          </a:p>
-        </p:txBody>
-      </p:sp>
-      <p:sp>
-        <p:nvSpPr>
-          <p:cNvPr id="41" name="TextBox 40"/>
-          <p:cNvSpPr txBox="1"/>
-          <p:nvPr/>
-        </p:nvSpPr>
-        <p:spPr>
-          <a:xfrm>
-            <a:off x="15316200" y="6217920"/>
-            <a:ext cx="2468880" cy="822960"/>
-          </a:xfrm>
-          <a:prstGeom prst="rect">
-            <a:avLst/>
-          </a:prstGeom>
-          <a:noFill/>
-        </p:spPr>
-        <p:txBody>
-          <a:bodyPr wrap="square">
-            <a:spAutoFit/>
-          </a:bodyPr>
-          <a:lstStyle/>
-          <a:p>
-            <a:pPr algn="ctr"/>
-            <a:r>
-              <a:rPr sz="1200">
-                <a:solidFill>
-                  <a:srgbClr val="666666"/>
-                </a:solidFill>
-                <a:latin typeface="Poppins"/>
-              </a:rPr>
-              <a:t>Measure, tune, and show what you built</a:t>
-            </a:r>
-          </a:p>
-        </p:txBody>
-      </p:sp>
-      <p:sp>
-        <p:nvSpPr>
-          <p:cNvPr id="42" name="TextBox 41"/>
-          <p:cNvSpPr txBox="1"/>
-          <p:nvPr/>
-        </p:nvSpPr>
-        <p:spPr>
-          <a:xfrm>
-            <a:off x="1069848" y="8503920"/>
-            <a:ext cx="15544800" cy="548640"/>
-          </a:xfrm>
-          <a:prstGeom prst="rect">
-            <a:avLst/>
-          </a:prstGeom>
-          <a:noFill/>
-        </p:spPr>
-        <p:txBody>
-          <a:bodyPr wrap="square">
-            <a:spAutoFit/>
-          </a:bodyPr>
-          <a:lstStyle/>
-          <a:p>
-            <a:pPr algn="ctr"/>
-            <a:r>
-              <a:rPr sz="2000">
-                <a:solidFill>
-                  <a:srgbClr val="666666"/>
-                </a:solidFill>
-                <a:latin typeface="Poppins Medium"/>
-              </a:rPr>
-              <a:t>8 lessons · 2 hours each · you leave with a program that knows what you know</a:t>
             </a:r>
           </a:p>
         </p:txBody>
@@ -12055,6 +10580,945 @@
                 <a:latin typeface="Poppins"/>
               </a:rPr>
               <a:t>Make follow-up questions work.</a:t>
+            </a:r>
+          </a:p>
+        </p:txBody>
+      </p:sp>
+    </p:spTree>
+  </p:cSld>
+  <p:clrMapOvr>
+    <a:masterClrMapping/>
+  </p:clrMapOvr>
+</p:sld>
+</file>
+
+<file path=ppt/slides/slide4.xml><?xml version="1.0" encoding="utf-8"?>
+<p:sld xmlns:a="http://schemas.openxmlformats.org/drawingml/2006/main" xmlns:p="http://schemas.openxmlformats.org/presentationml/2006/main" xmlns:r="http://schemas.openxmlformats.org/officeDocument/2006/relationships">
+  <p:cSld>
+    <p:spTree>
+      <p:nvGrpSpPr>
+        <p:cNvPr id="1" name=""/>
+        <p:cNvGrpSpPr/>
+        <p:nvPr/>
+      </p:nvGrpSpPr>
+      <p:grpSpPr/>
+      <p:sp>
+        <p:nvSpPr>
+          <p:cNvPr id="2" name="Rectangle 1"/>
+          <p:cNvSpPr/>
+          <p:nvPr/>
+        </p:nvSpPr>
+        <p:spPr>
+          <a:xfrm>
+            <a:off x="9144000" y="0"/>
+            <a:ext cx="9144000" cy="10287000"/>
+          </a:xfrm>
+          <a:prstGeom prst="rect">
+            <a:avLst/>
+          </a:prstGeom>
+          <a:solidFill>
+            <a:srgbClr val="F3F3F3"/>
+          </a:solidFill>
+          <a:ln>
+            <a:noFill/>
+          </a:ln>
+          <a:effectLst/>
+        </p:spPr>
+        <p:style>
+          <a:lnRef idx="1">
+            <a:schemeClr val="accent1"/>
+          </a:lnRef>
+          <a:fillRef idx="3">
+            <a:schemeClr val="accent1"/>
+          </a:fillRef>
+          <a:effectRef idx="2">
+            <a:schemeClr val="accent1"/>
+          </a:effectRef>
+          <a:fontRef idx="minor">
+            <a:schemeClr val="lt1"/>
+          </a:fontRef>
+        </p:style>
+        <p:txBody>
+          <a:bodyPr rtlCol="0" anchor="ctr"/>
+          <a:lstStyle/>
+          <a:p>
+            <a:pPr algn="ctr"/>
+          </a:p>
+        </p:txBody>
+      </p:sp>
+      <p:sp>
+        <p:nvSpPr>
+          <p:cNvPr id="3" name="TextBox 2"/>
+          <p:cNvSpPr txBox="1"/>
+          <p:nvPr/>
+        </p:nvSpPr>
+        <p:spPr>
+          <a:xfrm>
+            <a:off x="1069848" y="3849624"/>
+            <a:ext cx="5961888" cy="548640"/>
+          </a:xfrm>
+          <a:prstGeom prst="rect">
+            <a:avLst/>
+          </a:prstGeom>
+          <a:noFill/>
+        </p:spPr>
+        <p:txBody>
+          <a:bodyPr wrap="square">
+            <a:spAutoFit/>
+          </a:bodyPr>
+          <a:lstStyle/>
+          <a:p>
+            <a:pPr algn="l"/>
+            <a:r>
+              <a:rPr sz="3100">
+                <a:solidFill>
+                  <a:srgbClr val="666666"/>
+                </a:solidFill>
+                <a:latin typeface="Poppins Medium"/>
+              </a:rPr>
+              <a:t>The whole thing</a:t>
+            </a:r>
+          </a:p>
+        </p:txBody>
+      </p:sp>
+      <p:sp>
+        <p:nvSpPr>
+          <p:cNvPr id="4" name="TextBox 3"/>
+          <p:cNvSpPr txBox="1"/>
+          <p:nvPr/>
+        </p:nvSpPr>
+        <p:spPr>
+          <a:xfrm>
+            <a:off x="1069848" y="4572000"/>
+            <a:ext cx="7754112" cy="1828800"/>
+          </a:xfrm>
+          <a:prstGeom prst="rect">
+            <a:avLst/>
+          </a:prstGeom>
+          <a:noFill/>
+        </p:spPr>
+        <p:txBody>
+          <a:bodyPr wrap="square">
+            <a:spAutoFit/>
+          </a:bodyPr>
+          <a:lstStyle/>
+          <a:p>
+            <a:pPr algn="l"/>
+            <a:r>
+              <a:rPr sz="5000">
+                <a:solidFill>
+                  <a:srgbClr val="3627FC"/>
+                </a:solidFill>
+                <a:latin typeface="Poppins ExtraBold"/>
+              </a:rPr>
+              <a:t>Four steps</a:t>
+            </a:r>
+          </a:p>
+        </p:txBody>
+      </p:sp>
+      <p:sp>
+        <p:nvSpPr>
+          <p:cNvPr id="5" name="TextBox 4"/>
+          <p:cNvSpPr txBox="1"/>
+          <p:nvPr/>
+        </p:nvSpPr>
+        <p:spPr>
+          <a:xfrm>
+            <a:off x="9985248" y="3108960"/>
+            <a:ext cx="7242048" cy="4572000"/>
+          </a:xfrm>
+          <a:prstGeom prst="rect">
+            <a:avLst/>
+          </a:prstGeom>
+          <a:noFill/>
+        </p:spPr>
+        <p:txBody>
+          <a:bodyPr wrap="square">
+            <a:spAutoFit/>
+          </a:bodyPr>
+          <a:lstStyle/>
+          <a:p>
+            <a:pPr algn="l">
+              <a:spcAft>
+                <a:spcPts val="1600"/>
+              </a:spcAft>
+            </a:pPr>
+            <a:r>
+              <a:rPr sz="1800">
+                <a:solidFill>
+                  <a:srgbClr val="3627FC"/>
+                </a:solidFill>
+                <a:latin typeface="Poppins SemiBold"/>
+              </a:rPr>
+              <a:t>1.  Find the chunks closest in meaning to the question.</a:t>
+            </a:r>
+          </a:p>
+          <a:p>
+            <a:pPr algn="l">
+              <a:spcAft>
+                <a:spcPts val="1600"/>
+              </a:spcAft>
+            </a:pPr>
+            <a:r>
+              <a:rPr sz="1800">
+                <a:solidFill>
+                  <a:srgbClr val="3627FC"/>
+                </a:solidFill>
+                <a:latin typeface="Poppins SemiBold"/>
+              </a:rPr>
+              <a:t>2.  Join them into one block of text.</a:t>
+            </a:r>
+          </a:p>
+          <a:p>
+            <a:pPr algn="l">
+              <a:spcAft>
+                <a:spcPts val="1600"/>
+              </a:spcAft>
+            </a:pPr>
+            <a:r>
+              <a:rPr sz="1800">
+                <a:solidFill>
+                  <a:srgbClr val="3627FC"/>
+                </a:solidFill>
+                <a:latin typeface="Poppins SemiBold"/>
+              </a:rPr>
+              <a:t>3.  Paste that into the system prompt.</a:t>
+            </a:r>
+          </a:p>
+          <a:p>
+            <a:pPr algn="l">
+              <a:spcAft>
+                <a:spcPts val="1600"/>
+              </a:spcAft>
+            </a:pPr>
+            <a:r>
+              <a:rPr sz="1800">
+                <a:solidFill>
+                  <a:srgbClr val="3627FC"/>
+                </a:solidFill>
+                <a:latin typeface="Poppins SemiBold"/>
+              </a:rPr>
+              <a:t>4.  Ask the model.</a:t>
+            </a:r>
+          </a:p>
+          <a:p>
+            <a:pPr algn="l">
+              <a:spcAft>
+                <a:spcPts val="1600"/>
+              </a:spcAft>
+            </a:pPr>
+            <a:r>
+              <a:rPr sz="1800">
+                <a:solidFill>
+                  <a:srgbClr val="3627FC"/>
+                </a:solidFill>
+                <a:latin typeface="Poppins SemiBold"/>
+              </a:rPr>
+              <a:t>No model was retrained. We just decided well what to paste.</a:t>
+            </a:r>
+          </a:p>
+        </p:txBody>
+      </p:sp>
+    </p:spTree>
+  </p:cSld>
+  <p:clrMapOvr>
+    <a:masterClrMapping/>
+  </p:clrMapOvr>
+</p:sld>
+</file>
+
+<file path=ppt/slides/slide5.xml><?xml version="1.0" encoding="utf-8"?>
+<p:sld xmlns:a="http://schemas.openxmlformats.org/drawingml/2006/main" xmlns:p="http://schemas.openxmlformats.org/presentationml/2006/main" xmlns:r="http://schemas.openxmlformats.org/officeDocument/2006/relationships">
+  <p:cSld>
+    <p:spTree>
+      <p:nvGrpSpPr>
+        <p:cNvPr id="1" name=""/>
+        <p:cNvGrpSpPr/>
+        <p:nvPr/>
+      </p:nvGrpSpPr>
+      <p:grpSpPr/>
+      <p:sp>
+        <p:nvSpPr>
+          <p:cNvPr id="2" name="TextBox 1"/>
+          <p:cNvSpPr txBox="1"/>
+          <p:nvPr/>
+        </p:nvSpPr>
+        <p:spPr>
+          <a:xfrm>
+            <a:off x="1828800" y="3657600"/>
+            <a:ext cx="14630400" cy="2743200"/>
+          </a:xfrm>
+          <a:prstGeom prst="rect">
+            <a:avLst/>
+          </a:prstGeom>
+          <a:noFill/>
+        </p:spPr>
+        <p:txBody>
+          <a:bodyPr wrap="square">
+            <a:spAutoFit/>
+          </a:bodyPr>
+          <a:lstStyle/>
+          <a:p>
+            <a:pPr algn="ctr"/>
+            <a:r>
+              <a:rPr sz="4400">
+                <a:solidFill>
+                  <a:srgbClr val="3627FC"/>
+                </a:solidFill>
+                <a:latin typeface="Poppins ExtraBold"/>
+              </a:rPr>
+              <a:t>Print the prompt. Read it out loud.</a:t>
+            </a:r>
+          </a:p>
+        </p:txBody>
+      </p:sp>
+      <p:sp>
+        <p:nvSpPr>
+          <p:cNvPr id="3" name="TextBox 2"/>
+          <p:cNvSpPr txBox="1"/>
+          <p:nvPr/>
+        </p:nvSpPr>
+        <p:spPr>
+          <a:xfrm>
+            <a:off x="2743200" y="6949440"/>
+            <a:ext cx="12801600" cy="731520"/>
+          </a:xfrm>
+          <a:prstGeom prst="rect">
+            <a:avLst/>
+          </a:prstGeom>
+          <a:noFill/>
+        </p:spPr>
+        <p:txBody>
+          <a:bodyPr wrap="square">
+            <a:spAutoFit/>
+          </a:bodyPr>
+          <a:lstStyle/>
+          <a:p>
+            <a:pPr algn="ctr"/>
+            <a:r>
+              <a:rPr sz="2200">
+                <a:solidFill>
+                  <a:srgbClr val="666666"/>
+                </a:solidFill>
+                <a:latin typeface="Poppins"/>
+              </a:rPr>
+              <a:t>That is RAG, in full, with nothing hidden.</a:t>
+            </a:r>
+          </a:p>
+        </p:txBody>
+      </p:sp>
+    </p:spTree>
+  </p:cSld>
+  <p:clrMapOvr>
+    <a:masterClrMapping/>
+  </p:clrMapOvr>
+</p:sld>
+</file>
+
+<file path=ppt/slides/slide6.xml><?xml version="1.0" encoding="utf-8"?>
+<p:sld xmlns:a="http://schemas.openxmlformats.org/drawingml/2006/main" xmlns:p="http://schemas.openxmlformats.org/presentationml/2006/main" xmlns:r="http://schemas.openxmlformats.org/officeDocument/2006/relationships">
+  <p:cSld>
+    <p:spTree>
+      <p:nvGrpSpPr>
+        <p:cNvPr id="1" name=""/>
+        <p:cNvGrpSpPr/>
+        <p:nvPr/>
+      </p:nvGrpSpPr>
+      <p:grpSpPr/>
+      <p:sp>
+        <p:nvSpPr>
+          <p:cNvPr id="2" name="Rectangle 1"/>
+          <p:cNvSpPr/>
+          <p:nvPr/>
+        </p:nvSpPr>
+        <p:spPr>
+          <a:xfrm>
+            <a:off x="0" y="0"/>
+            <a:ext cx="9144000" cy="10287000"/>
+          </a:xfrm>
+          <a:prstGeom prst="rect">
+            <a:avLst/>
+          </a:prstGeom>
+          <a:solidFill>
+            <a:srgbClr val="F3F3F3"/>
+          </a:solidFill>
+          <a:ln>
+            <a:noFill/>
+          </a:ln>
+          <a:effectLst/>
+        </p:spPr>
+        <p:style>
+          <a:lnRef idx="1">
+            <a:schemeClr val="accent1"/>
+          </a:lnRef>
+          <a:fillRef idx="3">
+            <a:schemeClr val="accent1"/>
+          </a:fillRef>
+          <a:effectRef idx="2">
+            <a:schemeClr val="accent1"/>
+          </a:effectRef>
+          <a:fontRef idx="minor">
+            <a:schemeClr val="lt1"/>
+          </a:fontRef>
+        </p:style>
+        <p:txBody>
+          <a:bodyPr rtlCol="0" anchor="ctr"/>
+          <a:lstStyle/>
+          <a:p>
+            <a:pPr algn="ctr"/>
+          </a:p>
+        </p:txBody>
+      </p:sp>
+      <p:sp>
+        <p:nvSpPr>
+          <p:cNvPr id="3" name="TextBox 2"/>
+          <p:cNvSpPr txBox="1"/>
+          <p:nvPr/>
+        </p:nvSpPr>
+        <p:spPr>
+          <a:xfrm>
+            <a:off x="10058400" y="3849624"/>
+            <a:ext cx="5961888" cy="548640"/>
+          </a:xfrm>
+          <a:prstGeom prst="rect">
+            <a:avLst/>
+          </a:prstGeom>
+          <a:noFill/>
+        </p:spPr>
+        <p:txBody>
+          <a:bodyPr wrap="square">
+            <a:spAutoFit/>
+          </a:bodyPr>
+          <a:lstStyle/>
+          <a:p>
+            <a:pPr algn="l"/>
+            <a:r>
+              <a:rPr sz="3100">
+                <a:solidFill>
+                  <a:srgbClr val="666666"/>
+                </a:solidFill>
+                <a:latin typeface="Poppins Medium"/>
+              </a:rPr>
+              <a:t>The sentence</a:t>
+            </a:r>
+          </a:p>
+        </p:txBody>
+      </p:sp>
+      <p:sp>
+        <p:nvSpPr>
+          <p:cNvPr id="4" name="TextBox 3"/>
+          <p:cNvSpPr txBox="1"/>
+          <p:nvPr/>
+        </p:nvSpPr>
+        <p:spPr>
+          <a:xfrm>
+            <a:off x="10058400" y="4572000"/>
+            <a:ext cx="7754112" cy="1828800"/>
+          </a:xfrm>
+          <a:prstGeom prst="rect">
+            <a:avLst/>
+          </a:prstGeom>
+          <a:noFill/>
+        </p:spPr>
+        <p:txBody>
+          <a:bodyPr wrap="square">
+            <a:spAutoFit/>
+          </a:bodyPr>
+          <a:lstStyle/>
+          <a:p>
+            <a:pPr algn="l"/>
+            <a:r>
+              <a:rPr sz="5000">
+                <a:solidFill>
+                  <a:srgbClr val="3627FC"/>
+                </a:solidFill>
+                <a:latin typeface="Poppins ExtraBold"/>
+              </a:rPr>
+              <a:t>What makes it trustworthy</a:t>
+            </a:r>
+          </a:p>
+        </p:txBody>
+      </p:sp>
+      <p:sp>
+        <p:nvSpPr>
+          <p:cNvPr id="5" name="TextBox 4"/>
+          <p:cNvSpPr txBox="1"/>
+          <p:nvPr/>
+        </p:nvSpPr>
+        <p:spPr>
+          <a:xfrm>
+            <a:off x="1005840" y="3108960"/>
+            <a:ext cx="7242048" cy="4572000"/>
+          </a:xfrm>
+          <a:prstGeom prst="rect">
+            <a:avLst/>
+          </a:prstGeom>
+          <a:noFill/>
+        </p:spPr>
+        <p:txBody>
+          <a:bodyPr wrap="square">
+            <a:spAutoFit/>
+          </a:bodyPr>
+          <a:lstStyle/>
+          <a:p>
+            <a:pPr algn="l">
+              <a:spcAft>
+                <a:spcPts val="1600"/>
+              </a:spcAft>
+            </a:pPr>
+            <a:r>
+              <a:rPr sz="1800">
+                <a:solidFill>
+                  <a:srgbClr val="3627FC"/>
+                </a:solidFill>
+                <a:latin typeface="Poppins SemiBold"/>
+              </a:rPr>
+              <a:t>“If the notes do not contain the answer, say exactly: that isn’t in your documents. Do not guess.”</a:t>
+            </a:r>
+          </a:p>
+          <a:p>
+            <a:pPr algn="l">
+              <a:spcAft>
+                <a:spcPts val="1600"/>
+              </a:spcAft>
+            </a:pPr>
+            <a:r>
+              <a:rPr sz="1800">
+                <a:solidFill>
+                  <a:srgbClr val="3627FC"/>
+                </a:solidFill>
+                <a:latin typeface="Poppins SemiBold"/>
+              </a:rPr>
+              <a:t>That is it. One paragraph of English, no Python.</a:t>
+            </a:r>
+          </a:p>
+          <a:p>
+            <a:pPr algn="l">
+              <a:spcAft>
+                <a:spcPts val="1600"/>
+              </a:spcAft>
+            </a:pPr>
+            <a:r>
+              <a:rPr sz="1800">
+                <a:solidFill>
+                  <a:srgbClr val="3627FC"/>
+                </a:solidFill>
+                <a:latin typeface="Poppins SemiBold"/>
+              </a:rPr>
+              <a:t>Find a question yours refuses — and one where the refusal fails. The second is more interesting.</a:t>
+            </a:r>
+          </a:p>
+        </p:txBody>
+      </p:sp>
+    </p:spTree>
+  </p:cSld>
+  <p:clrMapOvr>
+    <a:masterClrMapping/>
+  </p:clrMapOvr>
+</p:sld>
+</file>
+
+<file path=ppt/slides/slide7.xml><?xml version="1.0" encoding="utf-8"?>
+<p:sld xmlns:a="http://schemas.openxmlformats.org/drawingml/2006/main" xmlns:p="http://schemas.openxmlformats.org/presentationml/2006/main" xmlns:r="http://schemas.openxmlformats.org/officeDocument/2006/relationships">
+  <p:cSld>
+    <p:spTree>
+      <p:nvGrpSpPr>
+        <p:cNvPr id="1" name=""/>
+        <p:cNvGrpSpPr/>
+        <p:nvPr/>
+      </p:nvGrpSpPr>
+      <p:grpSpPr/>
+      <p:sp>
+        <p:nvSpPr>
+          <p:cNvPr id="2" name="Rectangle 1"/>
+          <p:cNvSpPr/>
+          <p:nvPr/>
+        </p:nvSpPr>
+        <p:spPr>
+          <a:xfrm>
+            <a:off x="0" y="54864"/>
+            <a:ext cx="18288000" cy="2084831"/>
+          </a:xfrm>
+          <a:prstGeom prst="rect">
+            <a:avLst/>
+          </a:prstGeom>
+          <a:solidFill>
+            <a:srgbClr val="F3F3F3"/>
+          </a:solidFill>
+          <a:ln>
+            <a:noFill/>
+          </a:ln>
+          <a:effectLst/>
+        </p:spPr>
+        <p:style>
+          <a:lnRef idx="1">
+            <a:schemeClr val="accent1"/>
+          </a:lnRef>
+          <a:fillRef idx="3">
+            <a:schemeClr val="accent1"/>
+          </a:fillRef>
+          <a:effectRef idx="2">
+            <a:schemeClr val="accent1"/>
+          </a:effectRef>
+          <a:fontRef idx="minor">
+            <a:schemeClr val="lt1"/>
+          </a:fontRef>
+        </p:style>
+        <p:txBody>
+          <a:bodyPr rtlCol="0" anchor="ctr"/>
+          <a:lstStyle/>
+          <a:p>
+            <a:pPr algn="ctr"/>
+          </a:p>
+        </p:txBody>
+      </p:sp>
+      <p:sp>
+        <p:nvSpPr>
+          <p:cNvPr id="3" name="TextBox 2"/>
+          <p:cNvSpPr txBox="1"/>
+          <p:nvPr/>
+        </p:nvSpPr>
+        <p:spPr>
+          <a:xfrm>
+            <a:off x="3438144" y="667512"/>
+            <a:ext cx="11420856" cy="822960"/>
+          </a:xfrm>
+          <a:prstGeom prst="rect">
+            <a:avLst/>
+          </a:prstGeom>
+          <a:noFill/>
+        </p:spPr>
+        <p:txBody>
+          <a:bodyPr wrap="square">
+            <a:spAutoFit/>
+          </a:bodyPr>
+          <a:lstStyle/>
+          <a:p>
+            <a:pPr algn="ctr"/>
+            <a:r>
+              <a:rPr sz="5200">
+                <a:solidFill>
+                  <a:srgbClr val="3627FC"/>
+                </a:solidFill>
+                <a:latin typeface="Poppins ExtraBold"/>
+              </a:rPr>
+              <a:t>Why follow-ups break</a:t>
+            </a:r>
+          </a:p>
+        </p:txBody>
+      </p:sp>
+      <p:sp>
+        <p:nvSpPr>
+          <p:cNvPr id="4" name="Rectangle 3"/>
+          <p:cNvSpPr/>
+          <p:nvPr/>
+        </p:nvSpPr>
+        <p:spPr>
+          <a:xfrm>
+            <a:off x="941831" y="3008376"/>
+            <a:ext cx="8028432" cy="3017520"/>
+          </a:xfrm>
+          <a:prstGeom prst="rect">
+            <a:avLst/>
+          </a:prstGeom>
+          <a:solidFill>
+            <a:srgbClr val="31C59E"/>
+          </a:solidFill>
+          <a:ln>
+            <a:noFill/>
+          </a:ln>
+          <a:effectLst/>
+        </p:spPr>
+        <p:style>
+          <a:lnRef idx="1">
+            <a:schemeClr val="accent1"/>
+          </a:lnRef>
+          <a:fillRef idx="3">
+            <a:schemeClr val="accent1"/>
+          </a:fillRef>
+          <a:effectRef idx="2">
+            <a:schemeClr val="accent1"/>
+          </a:effectRef>
+          <a:fontRef idx="minor">
+            <a:schemeClr val="lt1"/>
+          </a:fontRef>
+        </p:style>
+        <p:txBody>
+          <a:bodyPr rtlCol="0" anchor="ctr"/>
+          <a:lstStyle/>
+          <a:p>
+            <a:pPr algn="ctr"/>
+          </a:p>
+        </p:txBody>
+      </p:sp>
+      <p:sp>
+        <p:nvSpPr>
+          <p:cNvPr id="5" name="Rectangle 4"/>
+          <p:cNvSpPr/>
+          <p:nvPr/>
+        </p:nvSpPr>
+        <p:spPr>
+          <a:xfrm>
+            <a:off x="832103" y="2907792"/>
+            <a:ext cx="8028432" cy="3017520"/>
+          </a:xfrm>
+          <a:prstGeom prst="rect">
+            <a:avLst/>
+          </a:prstGeom>
+          <a:solidFill>
+            <a:srgbClr val="FFFFFF"/>
+          </a:solidFill>
+          <a:ln>
+            <a:noFill/>
+          </a:ln>
+          <a:effectLst/>
+        </p:spPr>
+        <p:style>
+          <a:lnRef idx="1">
+            <a:schemeClr val="accent1"/>
+          </a:lnRef>
+          <a:fillRef idx="3">
+            <a:schemeClr val="accent1"/>
+          </a:fillRef>
+          <a:effectRef idx="2">
+            <a:schemeClr val="accent1"/>
+          </a:effectRef>
+          <a:fontRef idx="minor">
+            <a:schemeClr val="lt1"/>
+          </a:fontRef>
+        </p:style>
+        <p:txBody>
+          <a:bodyPr rtlCol="0" anchor="ctr"/>
+          <a:lstStyle/>
+          <a:p>
+            <a:pPr algn="ctr"/>
+          </a:p>
+        </p:txBody>
+      </p:sp>
+      <p:sp>
+        <p:nvSpPr>
+          <p:cNvPr id="6" name="TextBox 5"/>
+          <p:cNvSpPr txBox="1"/>
+          <p:nvPr/>
+        </p:nvSpPr>
+        <p:spPr>
+          <a:xfrm>
+            <a:off x="2221991" y="3557016"/>
+            <a:ext cx="5468112" cy="731520"/>
+          </a:xfrm>
+          <a:prstGeom prst="rect">
+            <a:avLst/>
+          </a:prstGeom>
+          <a:noFill/>
+        </p:spPr>
+        <p:txBody>
+          <a:bodyPr wrap="square">
+            <a:spAutoFit/>
+          </a:bodyPr>
+          <a:lstStyle/>
+          <a:p>
+            <a:pPr algn="l"/>
+            <a:r>
+              <a:rPr sz="3200">
+                <a:solidFill>
+                  <a:srgbClr val="434343"/>
+                </a:solidFill>
+                <a:latin typeface="Poppins ExtraBold"/>
+              </a:rPr>
+              <a:t>The model</a:t>
+            </a:r>
+          </a:p>
+        </p:txBody>
+      </p:sp>
+      <p:sp>
+        <p:nvSpPr>
+          <p:cNvPr id="7" name="TextBox 6"/>
+          <p:cNvSpPr txBox="1"/>
+          <p:nvPr/>
+        </p:nvSpPr>
+        <p:spPr>
+          <a:xfrm>
+            <a:off x="2221991" y="4379976"/>
+            <a:ext cx="5468112" cy="1463040"/>
+          </a:xfrm>
+          <a:prstGeom prst="rect">
+            <a:avLst/>
+          </a:prstGeom>
+          <a:noFill/>
+        </p:spPr>
+        <p:txBody>
+          <a:bodyPr wrap="square">
+            <a:spAutoFit/>
+          </a:bodyPr>
+          <a:lstStyle/>
+          <a:p>
+            <a:pPr algn="l"/>
+            <a:r>
+              <a:rPr sz="1800">
+                <a:solidFill>
+                  <a:srgbClr val="434343"/>
+                </a:solidFill>
+                <a:latin typeface="Poppins"/>
+              </a:rPr>
+              <a:t>“Which of them is cheaper?” - it does not know what “them” means. Replay the earlier turns.</a:t>
+            </a:r>
+          </a:p>
+        </p:txBody>
+      </p:sp>
+      <p:sp>
+        <p:nvSpPr>
+          <p:cNvPr id="8" name="Rectangle 7"/>
+          <p:cNvSpPr/>
+          <p:nvPr/>
+        </p:nvSpPr>
+        <p:spPr>
+          <a:xfrm>
+            <a:off x="9317736" y="3008376"/>
+            <a:ext cx="8028432" cy="3017520"/>
+          </a:xfrm>
+          <a:prstGeom prst="rect">
+            <a:avLst/>
+          </a:prstGeom>
+          <a:solidFill>
+            <a:srgbClr val="31C59E"/>
+          </a:solidFill>
+          <a:ln>
+            <a:noFill/>
+          </a:ln>
+          <a:effectLst/>
+        </p:spPr>
+        <p:style>
+          <a:lnRef idx="1">
+            <a:schemeClr val="accent1"/>
+          </a:lnRef>
+          <a:fillRef idx="3">
+            <a:schemeClr val="accent1"/>
+          </a:fillRef>
+          <a:effectRef idx="2">
+            <a:schemeClr val="accent1"/>
+          </a:effectRef>
+          <a:fontRef idx="minor">
+            <a:schemeClr val="lt1"/>
+          </a:fontRef>
+        </p:style>
+        <p:txBody>
+          <a:bodyPr rtlCol="0" anchor="ctr"/>
+          <a:lstStyle/>
+          <a:p>
+            <a:pPr algn="ctr"/>
+          </a:p>
+        </p:txBody>
+      </p:sp>
+      <p:sp>
+        <p:nvSpPr>
+          <p:cNvPr id="9" name="Rectangle 8"/>
+          <p:cNvSpPr/>
+          <p:nvPr/>
+        </p:nvSpPr>
+        <p:spPr>
+          <a:xfrm>
+            <a:off x="9208008" y="2907792"/>
+            <a:ext cx="8028432" cy="3017520"/>
+          </a:xfrm>
+          <a:prstGeom prst="rect">
+            <a:avLst/>
+          </a:prstGeom>
+          <a:solidFill>
+            <a:srgbClr val="FFFFFF"/>
+          </a:solidFill>
+          <a:ln>
+            <a:noFill/>
+          </a:ln>
+          <a:effectLst/>
+        </p:spPr>
+        <p:style>
+          <a:lnRef idx="1">
+            <a:schemeClr val="accent1"/>
+          </a:lnRef>
+          <a:fillRef idx="3">
+            <a:schemeClr val="accent1"/>
+          </a:fillRef>
+          <a:effectRef idx="2">
+            <a:schemeClr val="accent1"/>
+          </a:effectRef>
+          <a:fontRef idx="minor">
+            <a:schemeClr val="lt1"/>
+          </a:fontRef>
+        </p:style>
+        <p:txBody>
+          <a:bodyPr rtlCol="0" anchor="ctr"/>
+          <a:lstStyle/>
+          <a:p>
+            <a:pPr algn="ctr"/>
+          </a:p>
+        </p:txBody>
+      </p:sp>
+      <p:sp>
+        <p:nvSpPr>
+          <p:cNvPr id="10" name="TextBox 9"/>
+          <p:cNvSpPr txBox="1"/>
+          <p:nvPr/>
+        </p:nvSpPr>
+        <p:spPr>
+          <a:xfrm>
+            <a:off x="10597896" y="3557016"/>
+            <a:ext cx="5468112" cy="731520"/>
+          </a:xfrm>
+          <a:prstGeom prst="rect">
+            <a:avLst/>
+          </a:prstGeom>
+          <a:noFill/>
+        </p:spPr>
+        <p:txBody>
+          <a:bodyPr wrap="square">
+            <a:spAutoFit/>
+          </a:bodyPr>
+          <a:lstStyle/>
+          <a:p>
+            <a:pPr algn="l"/>
+            <a:r>
+              <a:rPr sz="3200">
+                <a:solidFill>
+                  <a:srgbClr val="434343"/>
+                </a:solidFill>
+                <a:latin typeface="Poppins ExtraBold"/>
+              </a:rPr>
+              <a:t>The search</a:t>
+            </a:r>
+          </a:p>
+        </p:txBody>
+      </p:sp>
+      <p:sp>
+        <p:nvSpPr>
+          <p:cNvPr id="11" name="TextBox 10"/>
+          <p:cNvSpPr txBox="1"/>
+          <p:nvPr/>
+        </p:nvSpPr>
+        <p:spPr>
+          <a:xfrm>
+            <a:off x="10597896" y="4379976"/>
+            <a:ext cx="5468112" cy="1463040"/>
+          </a:xfrm>
+          <a:prstGeom prst="rect">
+            <a:avLst/>
+          </a:prstGeom>
+          <a:noFill/>
+        </p:spPr>
+        <p:txBody>
+          <a:bodyPr wrap="square">
+            <a:spAutoFit/>
+          </a:bodyPr>
+          <a:lstStyle/>
+          <a:p>
+            <a:pPr algn="l"/>
+            <a:r>
+              <a:rPr sz="1800">
+                <a:solidFill>
+                  <a:srgbClr val="434343"/>
+                </a:solidFill>
+                <a:latin typeface="Poppins"/>
+              </a:rPr>
+              <a:t>Neither does the search. Glue the last two questions onto the query.</a:t>
             </a:r>
           </a:p>
         </p:txBody>
